--- a/public/product/investor/factduel-seed-deck.pptx
+++ b/public/product/investor/factduel-seed-deck.pptx
@@ -859,6 +859,24 @@
           <a:lstStyle/>
           <a:p>
             <a:r>
+              <a:t>Eight risks now, not seven. Route A on the business-model slide takes real money on the outcome of a knowledge question, and in many jurisdictions that is regulated as skill gaming or gambling rather than as a game sale. We have no answer and we say so rather than discovering it in diligence.</a:t>
+            </a:r>
+          </a:p>
+          <a:p/>
+          <a:p>
+            <a:r>
+              <a:t>The landscape slide already notes that Skillz runs real-money cash tournaments and has never been profitable. That is the nearest comparable to Route A and it is not an encouraging one — which is a reason to name the risk here, not to leave it off.</a:t>
+            </a:r>
+          </a:p>
+          <a:p/>
+          <a:p>
+            <a:r>
+              <a:t>Do not let this slide shrink to fit a line budget. Cutting a risk to make a page look tidier is the one edit this deck is not allowed to make.</a:t>
+            </a:r>
+          </a:p>
+          <a:p/>
+          <a:p>
+            <a:r>
               <a:t>Each risk has a named response rather than a reassurance.</a:t>
             </a:r>
           </a:p>
@@ -942,6 +960,11 @@
           <a:p>
             <a:r>
               <a:t>- FACT//DUEL internal: public/product/investor/numbers.md §7.1 and §7.2 (company disclosure)</a:t>
+            </a:r>
+          </a:p>
+          <a:p>
+            <a:r>
+              <a:t>- FACT//DUEL internal: public/product/investor/numbers.md §4.4b (company disclosure)</a:t>
             </a:r>
           </a:p>
         </p:txBody>
@@ -3045,6 +3068,16 @@
           </a:p>
           <a:p>
             <a:r>
+              <a:t>- FACT//DUEL internal — numbers.md §4.4b (company disclosure — the founder’s named monetisation route and what it would take)</a:t>
+            </a:r>
+          </a:p>
+          <a:p>
+            <a:r>
+              <a:t>  FACT//DUEL internal: public/product/investor/numbers.md §4.4b (company disclosure — the founder’s named monetisation route and what it would take)</a:t>
+            </a:r>
+          </a:p>
+          <a:p>
+            <a:r>
               <a:t>- Google Play — Kahoot! listing</a:t>
             </a:r>
           </a:p>
@@ -3115,6 +3148,16 @@
           </a:p>
           <a:p>
             <a:r>
+              <a:t>- FACT//DUEL internal — numbers.md §4.4b</a:t>
+            </a:r>
+          </a:p>
+          <a:p>
+            <a:r>
+              <a:t>  FACT//DUEL internal: public/product/investor/numbers.md §4.4b (company disclosure)</a:t>
+            </a:r>
+          </a:p>
+          <a:p>
+            <a:r>
               <a:t>- FACT//DUEL internal — numbers.md §4.4 and §4.5</a:t>
             </a:r>
           </a:p>
@@ -3171,26 +3214,6 @@
           <a:p>
             <a:r>
               <a:t>  https://www.factmr.com/report/second-screen-sports-apps-market</a:t>
-            </a:r>
-          </a:p>
-          <a:p>
-            <a:r>
-              <a:t>- The Business Research Company — fan engagement</a:t>
-            </a:r>
-          </a:p>
-          <a:p>
-            <a:r>
-              <a:t>  https://www.thebusinessresearchcompany.com/report/fan-engagement-global-market-report</a:t>
-            </a:r>
-          </a:p>
-          <a:p>
-            <a:r>
-              <a:t>- market.us — fan engagement market</a:t>
-            </a:r>
-          </a:p>
-          <a:p>
-            <a:r>
-              <a:t>  https://market.us/report/fan-engagement-market/</a:t>
             </a:r>
           </a:p>
         </p:txBody>
@@ -3266,6 +3289,26 @@
           <a:p/>
           <a:p>
             <a:r>
+              <a:t>- The Business Research Company — fan engagement</a:t>
+            </a:r>
+          </a:p>
+          <a:p>
+            <a:r>
+              <a:t>  https://www.thebusinessresearchcompany.com/report/fan-engagement-global-market-report</a:t>
+            </a:r>
+          </a:p>
+          <a:p>
+            <a:r>
+              <a:t>- market.us — fan engagement market</a:t>
+            </a:r>
+          </a:p>
+          <a:p>
+            <a:r>
+              <a:t>  https://market.us/report/fan-engagement-market/</a:t>
+            </a:r>
+          </a:p>
+          <a:p>
+            <a:r>
               <a:t>- MarketsandMarkets — game-based learning</a:t>
             </a:r>
           </a:p>
@@ -4317,6 +4360,30 @@
           <a:lstStyle/>
           <a:p>
             <a:r>
+              <a:t>Lead with what is NOT built, not with the model. Route A is the founder’s own route, recorded in numbers.md §4.4b on 14 September 2026: paid entry to a time-limited expedition event, one entry per player, a rotating question set so answers cannot be passed around. It is a coherent design — single entry is what makes a leaderboard mean anything, and rotation is the anti-collusion mechanism a fixed bank cannot provide.</a:t>
+            </a:r>
+          </a:p>
+          <a:p/>
+          <a:p>
+            <a:r>
+              <a:t>Volunteer the gap before you are asked, because a reader can check every word of it in the public repository in about two minutes. Today: there is no payment surface anywhere in the tree; the duel coins say on screen "Free simulated coins. No monetary value."; expedition stake tiers stake RUN-SCORE POINTS and never a currency (+2/0, +3/-1, +4/-3, lib/expeditions.mjs), under a design rule that nothing stakes a currency and nothing is minted by losing; expeditions are replayable by design and there are no accounts, so "one entry per player" is not yet expressible; and a route’s six cards are frozen — a replay reshuffles the OPTIONS, not the questions, out of a 54-question bank.</a:t>
+            </a:r>
+          </a:p>
+          <a:p/>
+          <a:p>
+            <a:r>
+              <a:t>What is already built and would be reused: lib/events.mjs derives up to four limited-time modes a month, deterministically from the month and a hand-checked calendar, so the time-limited and rotating halves have a working mechanism behind them. It rotates duel modes today, pays XP, and takes no money.</a:t>
+            </a:r>
+          </a:p>
+          <a:p/>
+          <a:p>
+            <a:r>
+              <a:t>Route A is therefore gated on milestone 1 (accounts), milestone 4 (a bank past 54) and a wagering-law answer, which is on the risks slide. If you are asked which you would build: Route B first, because it is testable on the cohort this round buys, while Route A needs three other things to land before it can be tested at all.</a:t>
+            </a:r>
+          </a:p>
+          <a:p/>
+          <a:p>
+            <a:r>
               <a:t>Longest-dwell slide in a seed deck at 64 seconds in DocSend's estimates, so it is the densest page here and the one to rehearse hardest. The argument in one breath: the category does monetise, just not as consumer trivia IAP.</a:t>
             </a:r>
           </a:p>
@@ -4405,6 +4472,11 @@
           <a:p>
             <a:r>
               <a:t>- FACT//DUEL internal: public/product/investor/numbers.md §4.1-§4.3</a:t>
+            </a:r>
+          </a:p>
+          <a:p>
+            <a:r>
+              <a:t>- FACT//DUEL internal: public/product/investor/numbers.md §4.4b (company disclosure — the founder’s named monetisation route and what it would take)</a:t>
             </a:r>
           </a:p>
         </p:txBody>
@@ -9458,7 +9530,7 @@
                 </a:solidFill>
                 <a:latin typeface="Arial"/>
               </a:rPr>
-              <a:t>FACT//DUEL internal — numbers.md §7.1 and §7.2</a:t>
+              <a:t>FACT//DUEL internal — numbers.md §7.1 and §7.2  ·  FACT//DUEL internal — numbers.md §4.4b</a:t>
             </a:r>
           </a:p>
         </p:txBody>
@@ -9485,7 +9557,7 @@
           </a:bodyPr>
           <a:lstStyle/>
           <a:p>
-            <a:pPr marL="281154" indent="-281154">
+            <a:pPr marL="255604" indent="-255604">
               <a:lnSpc>
                 <a:spcPct val="116000"/>
               </a:lnSpc>
@@ -9496,7 +9568,7 @@
               <a:buChar char="—"/>
             </a:pPr>
             <a:r>
-              <a:rPr sz="1650" b="0" i="0">
+              <a:rPr sz="1500" b="0" i="0">
                 <a:solidFill>
                   <a:srgbClr val="F7F6EF"/>
                 </a:solidFill>
@@ -9506,12 +9578,12 @@
             </a:r>
           </a:p>
           <a:p>
-            <a:pPr marL="281154" indent="-281154">
+            <a:pPr marL="255604" indent="-255604">
               <a:lnSpc>
                 <a:spcPct val="116000"/>
               </a:lnSpc>
               <a:spcBef>
-                <a:spcPts val="907"/>
+                <a:spcPts val="825"/>
               </a:spcBef>
               <a:buClr>
                 <a:srgbClr val="D4FF3A"/>
@@ -9520,7 +9592,7 @@
               <a:buChar char="—"/>
             </a:pPr>
             <a:r>
-              <a:rPr sz="1650" b="0" i="0">
+              <a:rPr sz="1500" b="0" i="0">
                 <a:solidFill>
                   <a:srgbClr val="F7F6EF"/>
                 </a:solidFill>
@@ -9530,12 +9602,12 @@
             </a:r>
           </a:p>
           <a:p>
-            <a:pPr marL="281154" indent="-281154">
+            <a:pPr marL="255604" indent="-255604">
               <a:lnSpc>
                 <a:spcPct val="116000"/>
               </a:lnSpc>
               <a:spcBef>
-                <a:spcPts val="907"/>
+                <a:spcPts val="825"/>
               </a:spcBef>
               <a:buClr>
                 <a:srgbClr val="D4FF3A"/>
@@ -9544,7 +9616,7 @@
               <a:buChar char="—"/>
             </a:pPr>
             <a:r>
-              <a:rPr sz="1650" b="0" i="0">
+              <a:rPr sz="1500" b="0" i="0">
                 <a:solidFill>
                   <a:srgbClr val="F7F6EF"/>
                 </a:solidFill>
@@ -9553,7 +9625,7 @@
               <a:t>Opponent integrity. Skillz won a </a:t>
             </a:r>
             <a:r>
-              <a:rPr sz="1650" b="0" i="0">
+              <a:rPr sz="1500" b="0" i="0">
                 <a:solidFill>
                   <a:srgbClr val="FFC83D"/>
                 </a:solidFill>
@@ -9562,7 +9634,7 @@
               <a:t>$42.9M</a:t>
             </a:r>
             <a:r>
-              <a:rPr sz="1650" b="0" i="0">
+              <a:rPr sz="1500" b="0" i="0">
                 <a:solidFill>
                   <a:srgbClr val="F7F6EF"/>
                 </a:solidFill>
@@ -9572,12 +9644,12 @@
             </a:r>
           </a:p>
           <a:p>
-            <a:pPr marL="281154" indent="-281154">
+            <a:pPr marL="255604" indent="-255604">
               <a:lnSpc>
                 <a:spcPct val="116000"/>
               </a:lnSpc>
               <a:spcBef>
-                <a:spcPts val="907"/>
+                <a:spcPts val="825"/>
               </a:spcBef>
               <a:buClr>
                 <a:srgbClr val="D4FF3A"/>
@@ -9586,7 +9658,7 @@
               <a:buChar char="—"/>
             </a:pPr>
             <a:r>
-              <a:rPr sz="1650" b="0" i="0">
+              <a:rPr sz="1500" b="0" i="0">
                 <a:solidFill>
                   <a:srgbClr val="F7F6EF"/>
                 </a:solidFill>
@@ -9596,12 +9668,12 @@
             </a:r>
           </a:p>
           <a:p>
-            <a:pPr marL="281154" indent="-281154">
+            <a:pPr marL="255604" indent="-255604">
               <a:lnSpc>
                 <a:spcPct val="116000"/>
               </a:lnSpc>
               <a:spcBef>
-                <a:spcPts val="907"/>
+                <a:spcPts val="825"/>
               </a:spcBef>
               <a:buClr>
                 <a:srgbClr val="D4FF3A"/>
@@ -9610,7 +9682,7 @@
               <a:buChar char="—"/>
             </a:pPr>
             <a:r>
-              <a:rPr sz="1650" b="0" i="0">
+              <a:rPr sz="1500" b="0" i="0">
                 <a:solidFill>
                   <a:srgbClr val="F7F6EF"/>
                 </a:solidFill>
@@ -9620,12 +9692,12 @@
             </a:r>
           </a:p>
           <a:p>
-            <a:pPr marL="281154" indent="-281154">
+            <a:pPr marL="255604" indent="-255604">
               <a:lnSpc>
                 <a:spcPct val="116000"/>
               </a:lnSpc>
               <a:spcBef>
-                <a:spcPts val="907"/>
+                <a:spcPts val="825"/>
               </a:spcBef>
               <a:buClr>
                 <a:srgbClr val="D4FF3A"/>
@@ -9634,7 +9706,7 @@
               <a:buChar char="—"/>
             </a:pPr>
             <a:r>
-              <a:rPr sz="1650" b="0" i="0">
+              <a:rPr sz="1500" b="0" i="0">
                 <a:solidFill>
                   <a:srgbClr val="F7F6EF"/>
                 </a:solidFill>
@@ -9644,12 +9716,12 @@
             </a:r>
           </a:p>
           <a:p>
-            <a:pPr marL="281154" indent="-281154">
+            <a:pPr marL="255604" indent="-255604">
               <a:lnSpc>
                 <a:spcPct val="116000"/>
               </a:lnSpc>
               <a:spcBef>
-                <a:spcPts val="907"/>
+                <a:spcPts val="825"/>
               </a:spcBef>
               <a:buClr>
                 <a:srgbClr val="D4FF3A"/>
@@ -9658,7 +9730,7 @@
               <a:buChar char="—"/>
             </a:pPr>
             <a:r>
-              <a:rPr sz="1650" b="0" i="0">
+              <a:rPr sz="1500" b="0" i="0">
                 <a:solidFill>
                   <a:srgbClr val="F7F6EF"/>
                 </a:solidFill>
@@ -9667,7 +9739,7 @@
               <a:t>Model honesty. Our base case </a:t>
             </a:r>
             <a:r>
-              <a:rPr sz="1650" b="1" i="0">
+              <a:rPr sz="1500" b="1" i="0">
                 <a:solidFill>
                   <a:srgbClr val="4EE1FF"/>
                 </a:solidFill>
@@ -9676,7 +9748,7 @@
               <a:t>(P)</a:t>
             </a:r>
             <a:r>
-              <a:rPr sz="1650" b="0" i="0">
+              <a:rPr sz="1500" b="0" i="0">
                 <a:solidFill>
                   <a:srgbClr val="F7F6EF"/>
                 </a:solidFill>
@@ -9685,7 +9757,7 @@
               <a:t> out-monetises a 9.03%-conversion subscription at </a:t>
             </a:r>
             <a:r>
-              <a:rPr sz="1650" b="0" i="0">
+              <a:rPr sz="1500" b="0" i="0">
                 <a:solidFill>
                   <a:srgbClr val="FFC83D"/>
                 </a:solidFill>
@@ -9694,13 +9766,37 @@
               <a:t>$43.99</a:t>
             </a:r>
             <a:r>
-              <a:rPr sz="1650" b="0" i="0">
+              <a:rPr sz="1500" b="0" i="0">
                 <a:solidFill>
                   <a:srgbClr val="F7F6EF"/>
                 </a:solidFill>
                 <a:latin typeface="Arial"/>
               </a:rPr>
               <a:t>/yr by 3.88x. We flag it, not hide it.</a:t>
+            </a:r>
+          </a:p>
+          <a:p>
+            <a:pPr marL="255604" indent="-255604">
+              <a:lnSpc>
+                <a:spcPct val="116000"/>
+              </a:lnSpc>
+              <a:spcBef>
+                <a:spcPts val="825"/>
+              </a:spcBef>
+              <a:buClr>
+                <a:srgbClr val="D4FF3A"/>
+              </a:buClr>
+              <a:buFont typeface="Arial"/>
+              <a:buChar char="—"/>
+            </a:pPr>
+            <a:r>
+              <a:rPr sz="1500" b="0" i="0">
+                <a:solidFill>
+                  <a:srgbClr val="F7F6EF"/>
+                </a:solidFill>
+                <a:latin typeface="Arial"/>
+              </a:rPr>
+              <a:t>Wagering law. Route A stakes real money on a knowledge outcome — regulated as skill gaming or gambling in many jurisdictions. Unanswered.</a:t>
             </a:r>
           </a:p>
         </p:txBody>
@@ -21107,7 +21203,7 @@
                 </a:solidFill>
                 <a:latin typeface="Arial"/>
               </a:rPr>
-              <a:t>66 distinct sources across 20 slides. Full URLs are in the speaker notes of every slide.</a:t>
+              <a:t>68 distinct sources across 20 slides. Full URLs are in the speaker notes of every slide.</a:t>
             </a:r>
           </a:p>
           <a:p>
@@ -24657,9 +24753,9 @@
                 <a:tableStyleId>{2D5ABB26-0587-4C30-8999-92F81FD0307C}</a:tableStyleId>
               </a:tblPr>
               <a:tblGrid>
-                <a:gridCol w="6418869"/>
-                <a:gridCol w="3324343"/>
-                <a:gridCol w="1314625"/>
+                <a:gridCol w="8423326"/>
+                <a:gridCol w="1887924"/>
+                <a:gridCol w="746587"/>
               </a:tblGrid>
               <a:tr h="205965">
                 <a:tc>
@@ -24928,7 +25024,7 @@
                           </a:solidFill>
                           <a:latin typeface="Arial"/>
                         </a:rPr>
-                        <a:t>Google Play — Kahoot! listing</a:t>
+                        <a:t>FACT//DUEL internal — numbers.md §4.4b (company disclosure — the founder’s named monetisation route and what it would take)</a:t>
                       </a:r>
                     </a:p>
                   </a:txBody>
@@ -24955,7 +25051,7 @@
                           </a:solidFill>
                           <a:latin typeface="Arial"/>
                         </a:rPr>
-                        <a:t>company disclosure</a:t>
+                        <a:t>internal (company disclosure)</a:t>
                       </a:r>
                     </a:p>
                   </a:txBody>
@@ -24982,7 +25078,7 @@
                           </a:solidFill>
                           <a:latin typeface="Arial"/>
                         </a:rPr>
-                        <a:t>10</a:t>
+                        <a:t>9</a:t>
                       </a:r>
                     </a:p>
                   </a:txBody>
@@ -25011,7 +25107,7 @@
                           </a:solidFill>
                           <a:latin typeface="Arial"/>
                         </a:rPr>
-                        <a:t>Oslo Børs — Kahoot! delisting notice</a:t>
+                        <a:t>Google Play — Kahoot! listing</a:t>
                       </a:r>
                     </a:p>
                   </a:txBody>
@@ -25094,7 +25190,7 @@
                           </a:solidFill>
                           <a:latin typeface="Arial"/>
                         </a:rPr>
-                        <a:t>PR Newswire — Quizizz $31.5M Series B</a:t>
+                        <a:t>Oslo Børs — Kahoot! delisting notice</a:t>
                       </a:r>
                     </a:p>
                   </a:txBody>
@@ -25121,7 +25217,7 @@
                           </a:solidFill>
                           <a:latin typeface="Arial"/>
                         </a:rPr>
-                        <a:t>press report</a:t>
+                        <a:t>company disclosure</a:t>
                       </a:r>
                     </a:p>
                   </a:txBody>
@@ -25177,7 +25273,7 @@
                           </a:solidFill>
                           <a:latin typeface="Arial"/>
                         </a:rPr>
-                        <a:t>Apple lookup API — Wayground listing</a:t>
+                        <a:t>PR Newswire — Quizizz $31.5M Series B</a:t>
                       </a:r>
                     </a:p>
                   </a:txBody>
@@ -25204,7 +25300,7 @@
                           </a:solidFill>
                           <a:latin typeface="Arial"/>
                         </a:rPr>
-                        <a:t>company disclosure</a:t>
+                        <a:t>press report</a:t>
                       </a:r>
                     </a:p>
                   </a:txBody>
@@ -25260,7 +25356,7 @@
                           </a:solidFill>
                           <a:latin typeface="Arial"/>
                         </a:rPr>
-                        <a:t>SEC 8-K — Skillz FY2025 results</a:t>
+                        <a:t>Apple lookup API — Wayground listing</a:t>
                       </a:r>
                     </a:p>
                   </a:txBody>
@@ -25314,7 +25410,7 @@
                           </a:solidFill>
                           <a:latin typeface="Arial"/>
                         </a:rPr>
-                        <a:t>10, 17</a:t>
+                        <a:t>10</a:t>
                       </a:r>
                     </a:p>
                   </a:txBody>
@@ -25343,7 +25439,7 @@
                           </a:solidFill>
                           <a:latin typeface="Arial"/>
                         </a:rPr>
-                        <a:t>SEC 8-K — Skillz FY2022 results (FY2021 peak)</a:t>
+                        <a:t>SEC 8-K — Skillz FY2025 results</a:t>
                       </a:r>
                     </a:p>
                   </a:txBody>
@@ -25370,7 +25466,7 @@
                           </a:solidFill>
                           <a:latin typeface="Arial"/>
                         </a:rPr>
-                        <a:t>audited filing</a:t>
+                        <a:t>company disclosure</a:t>
                       </a:r>
                     </a:p>
                   </a:txBody>
@@ -25426,7 +25522,7 @@
                           </a:solidFill>
                           <a:latin typeface="Arial"/>
                         </a:rPr>
-                        <a:t>SEC 10-K — Skillz FY2023 (Skillz v. AviaGames)</a:t>
+                        <a:t>SEC 8-K — Skillz FY2022 results (FY2021 peak)</a:t>
                       </a:r>
                     </a:p>
                   </a:txBody>
@@ -25453,7 +25549,7 @@
                           </a:solidFill>
                           <a:latin typeface="Arial"/>
                         </a:rPr>
-                        <a:t>press report</a:t>
+                        <a:t>audited filing</a:t>
                       </a:r>
                     </a:p>
                   </a:txBody>
@@ -25480,7 +25576,7 @@
                           </a:solidFill>
                           <a:latin typeface="Arial"/>
                         </a:rPr>
-                        <a:t>11</a:t>
+                        <a:t>10, 17</a:t>
                       </a:r>
                     </a:p>
                   </a:txBody>
@@ -25509,7 +25605,7 @@
                           </a:solidFill>
                           <a:latin typeface="Arial"/>
                         </a:rPr>
-                        <a:t>FACT//DUEL internal — numbers.md §4.4 and §4.5</a:t>
+                        <a:t>SEC 10-K — Skillz FY2023 (Skillz v. AviaGames)</a:t>
                       </a:r>
                     </a:p>
                   </a:txBody>
@@ -25536,7 +25632,7 @@
                           </a:solidFill>
                           <a:latin typeface="Arial"/>
                         </a:rPr>
-                        <a:t>internal (company disclosure)</a:t>
+                        <a:t>press report</a:t>
                       </a:r>
                     </a:p>
                   </a:txBody>
@@ -25563,7 +25659,7 @@
                           </a:solidFill>
                           <a:latin typeface="Arial"/>
                         </a:rPr>
-                        <a:t>12</a:t>
+                        <a:t>11</a:t>
                       </a:r>
                     </a:p>
                   </a:txBody>
@@ -25592,7 +25688,7 @@
                           </a:solidFill>
                           <a:latin typeface="Arial"/>
                         </a:rPr>
-                        <a:t>Carta — State of Private Markets, Q3 2025</a:t>
+                        <a:t>FACT//DUEL internal — numbers.md §4.4b</a:t>
                       </a:r>
                     </a:p>
                   </a:txBody>
@@ -25619,7 +25715,7 @@
                           </a:solidFill>
                           <a:latin typeface="Arial"/>
                         </a:rPr>
-                        <a:t>third-party estimate</a:t>
+                        <a:t>internal (company disclosure)</a:t>
                       </a:r>
                     </a:p>
                   </a:txBody>
@@ -25646,7 +25742,7 @@
                           </a:solidFill>
                           <a:latin typeface="Arial"/>
                         </a:rPr>
-                        <a:t>13</a:t>
+                        <a:t>11</a:t>
                       </a:r>
                     </a:p>
                   </a:txBody>
@@ -25675,7 +25771,7 @@
                           </a:solidFill>
                           <a:latin typeface="Arial"/>
                         </a:rPr>
-                        <a:t>Crunchbase — US seed funding, 2025</a:t>
+                        <a:t>FACT//DUEL internal — numbers.md §4.4 and §4.5</a:t>
                       </a:r>
                     </a:p>
                   </a:txBody>
@@ -25702,7 +25798,7 @@
                           </a:solidFill>
                           <a:latin typeface="Arial"/>
                         </a:rPr>
-                        <a:t>press report</a:t>
+                        <a:t>internal (company disclosure)</a:t>
                       </a:r>
                     </a:p>
                   </a:txBody>
@@ -25729,7 +25825,7 @@
                           </a:solidFill>
                           <a:latin typeface="Arial"/>
                         </a:rPr>
-                        <a:t>13</a:t>
+                        <a:t>12</a:t>
                       </a:r>
                     </a:p>
                   </a:txBody>
@@ -25758,7 +25854,7 @@
                           </a:solidFill>
                           <a:latin typeface="Arial"/>
                         </a:rPr>
-                        <a:t>FACT//DUEL internal — numbers.md §4.4, §4.5 and §5.8</a:t>
+                        <a:t>Carta — State of Private Markets, Q3 2025</a:t>
                       </a:r>
                     </a:p>
                   </a:txBody>
@@ -25785,7 +25881,7 @@
                           </a:solidFill>
                           <a:latin typeface="Arial"/>
                         </a:rPr>
-                        <a:t>internal (company disclosure)</a:t>
+                        <a:t>third-party estimate</a:t>
                       </a:r>
                     </a:p>
                   </a:txBody>
@@ -25841,7 +25937,7 @@
                           </a:solidFill>
                           <a:latin typeface="Arial"/>
                         </a:rPr>
-                        <a:t>FACT//DUEL internal — numbers.md §7.1 and §7.3</a:t>
+                        <a:t>Crunchbase — US seed funding, 2025</a:t>
                       </a:r>
                     </a:p>
                   </a:txBody>
@@ -25868,7 +25964,7 @@
                           </a:solidFill>
                           <a:latin typeface="Arial"/>
                         </a:rPr>
-                        <a:t>internal (company disclosure)</a:t>
+                        <a:t>press report</a:t>
                       </a:r>
                     </a:p>
                   </a:txBody>
@@ -25895,7 +25991,7 @@
                           </a:solidFill>
                           <a:latin typeface="Arial"/>
                         </a:rPr>
-                        <a:t>13, 18, 20</a:t>
+                        <a:t>13</a:t>
                       </a:r>
                     </a:p>
                   </a:txBody>
@@ -25924,7 +26020,7 @@
                           </a:solidFill>
                           <a:latin typeface="Arial"/>
                         </a:rPr>
-                        <a:t>Fact.MR — second-screen sports apps market</a:t>
+                        <a:t>FACT//DUEL internal — numbers.md §4.4, §4.5 and §5.8</a:t>
                       </a:r>
                     </a:p>
                   </a:txBody>
@@ -25951,7 +26047,7 @@
                           </a:solidFill>
                           <a:latin typeface="Arial"/>
                         </a:rPr>
-                        <a:t>third-party estimate</a:t>
+                        <a:t>internal (company disclosure)</a:t>
                       </a:r>
                     </a:p>
                   </a:txBody>
@@ -25978,7 +26074,7 @@
                           </a:solidFill>
                           <a:latin typeface="Arial"/>
                         </a:rPr>
-                        <a:t>14</a:t>
+                        <a:t>13</a:t>
                       </a:r>
                     </a:p>
                   </a:txBody>
@@ -26007,7 +26103,7 @@
                           </a:solidFill>
                           <a:latin typeface="Arial"/>
                         </a:rPr>
-                        <a:t>The Business Research Company — fan engagement</a:t>
+                        <a:t>FACT//DUEL internal — numbers.md §7.1 and §7.3</a:t>
                       </a:r>
                     </a:p>
                   </a:txBody>
@@ -26034,7 +26130,7 @@
                           </a:solidFill>
                           <a:latin typeface="Arial"/>
                         </a:rPr>
-                        <a:t>third-party estimate</a:t>
+                        <a:t>internal (company disclosure)</a:t>
                       </a:r>
                     </a:p>
                   </a:txBody>
@@ -26061,7 +26157,7 @@
                           </a:solidFill>
                           <a:latin typeface="Arial"/>
                         </a:rPr>
-                        <a:t>14</a:t>
+                        <a:t>13, 18, 20</a:t>
                       </a:r>
                     </a:p>
                   </a:txBody>
@@ -26090,7 +26186,7 @@
                           </a:solidFill>
                           <a:latin typeface="Arial"/>
                         </a:rPr>
-                        <a:t>market.us — fan engagement market</a:t>
+                        <a:t>Fact.MR — second-screen sports apps market</a:t>
                       </a:r>
                     </a:p>
                   </a:txBody>
@@ -26387,7 +26483,7 @@
         </p:nvGraphicFramePr>
         <p:xfrm>
           <a:off x="566928" y="2199640"/>
-          <a:ext cx="11057838" cy="3707376"/>
+          <a:ext cx="11057838" cy="3707370"/>
         </p:xfrm>
         <a:graphic>
           <a:graphicData uri="http://schemas.openxmlformats.org/drawingml/2006/table">
@@ -26396,23 +26492,23 @@
                 <a:tableStyleId>{2D5ABB26-0587-4C30-8999-92F81FD0307C}</a:tableStyleId>
               </a:tblPr>
               <a:tblGrid>
-                <a:gridCol w="7453186"/>
-                <a:gridCol w="2658443"/>
-                <a:gridCol w="946209"/>
+                <a:gridCol w="7419042"/>
+                <a:gridCol w="2667800"/>
+                <a:gridCol w="970996"/>
               </a:tblGrid>
-              <a:tr h="231711">
-                <a:tc>
-                  <a:txBody>
-                    <a:bodyPr wrap="square"/>
-                    <a:lstStyle/>
-                    <a:p>
-                      <a:pPr>
-                        <a:lnSpc>
-                          <a:spcPct val="114000"/>
-                        </a:lnSpc>
-                      </a:pPr>
-                      <a:r>
-                        <a:rPr sz="1000" b="1" i="0">
+              <a:tr h="205965">
+                <a:tc>
+                  <a:txBody>
+                    <a:bodyPr wrap="square"/>
+                    <a:lstStyle/>
+                    <a:p>
+                      <a:pPr>
+                        <a:lnSpc>
+                          <a:spcPct val="114000"/>
+                        </a:lnSpc>
+                      </a:pPr>
+                      <a:r>
+                        <a:rPr sz="850" b="1" i="0">
                           <a:solidFill>
                             <a:srgbClr val="D4FF3A"/>
                           </a:solidFill>
@@ -26439,7 +26535,7 @@
                         </a:lnSpc>
                       </a:pPr>
                       <a:r>
-                        <a:rPr sz="1000" b="1" i="0">
+                        <a:rPr sz="850" b="1" i="0">
                           <a:solidFill>
                             <a:srgbClr val="D4FF3A"/>
                           </a:solidFill>
@@ -26466,7 +26562,7 @@
                         </a:lnSpc>
                       </a:pPr>
                       <a:r>
-                        <a:rPr sz="1000" b="1" i="0">
+                        <a:rPr sz="850" b="1" i="0">
                           <a:solidFill>
                             <a:srgbClr val="D4FF3A"/>
                           </a:solidFill>
@@ -26483,19 +26579,185 @@
                   </a:tcPr>
                 </a:tc>
               </a:tr>
-              <a:tr h="231711">
-                <a:tc>
-                  <a:txBody>
-                    <a:bodyPr wrap="square"/>
-                    <a:lstStyle/>
-                    <a:p>
-                      <a:pPr>
-                        <a:lnSpc>
-                          <a:spcPct val="114000"/>
-                        </a:lnSpc>
-                      </a:pPr>
-                      <a:r>
-                        <a:rPr sz="1000" b="1" i="0">
+              <a:tr h="205965">
+                <a:tc>
+                  <a:txBody>
+                    <a:bodyPr wrap="square"/>
+                    <a:lstStyle/>
+                    <a:p>
+                      <a:pPr>
+                        <a:lnSpc>
+                          <a:spcPct val="114000"/>
+                        </a:lnSpc>
+                      </a:pPr>
+                      <a:r>
+                        <a:rPr sz="850" b="1" i="0">
+                          <a:solidFill>
+                            <a:srgbClr val="F7F6EF"/>
+                          </a:solidFill>
+                          <a:latin typeface="Arial"/>
+                        </a:rPr>
+                        <a:t>The Business Research Company — fan engagement</a:t>
+                      </a:r>
+                    </a:p>
+                  </a:txBody>
+                  <a:tcPr marL="64008" marR="64008" marT="41148" marB="41148" anchor="ctr">
+                    <a:solidFill>
+                      <a:srgbClr val="121821"/>
+                    </a:solidFill>
+                  </a:tcPr>
+                </a:tc>
+                <a:tc>
+                  <a:txBody>
+                    <a:bodyPr wrap="square"/>
+                    <a:lstStyle/>
+                    <a:p>
+                      <a:pPr>
+                        <a:lnSpc>
+                          <a:spcPct val="114000"/>
+                        </a:lnSpc>
+                      </a:pPr>
+                      <a:r>
+                        <a:rPr sz="850" b="0" i="0">
+                          <a:solidFill>
+                            <a:srgbClr val="F7F6EF"/>
+                          </a:solidFill>
+                          <a:latin typeface="Arial"/>
+                        </a:rPr>
+                        <a:t>third-party estimate</a:t>
+                      </a:r>
+                    </a:p>
+                  </a:txBody>
+                  <a:tcPr marL="64008" marR="64008" marT="41148" marB="41148" anchor="ctr">
+                    <a:solidFill>
+                      <a:srgbClr val="121821"/>
+                    </a:solidFill>
+                  </a:tcPr>
+                </a:tc>
+                <a:tc>
+                  <a:txBody>
+                    <a:bodyPr wrap="square"/>
+                    <a:lstStyle/>
+                    <a:p>
+                      <a:pPr>
+                        <a:lnSpc>
+                          <a:spcPct val="114000"/>
+                        </a:lnSpc>
+                      </a:pPr>
+                      <a:r>
+                        <a:rPr sz="850" b="0" i="0">
+                          <a:solidFill>
+                            <a:srgbClr val="F7F6EF"/>
+                          </a:solidFill>
+                          <a:latin typeface="Arial"/>
+                        </a:rPr>
+                        <a:t>14</a:t>
+                      </a:r>
+                    </a:p>
+                  </a:txBody>
+                  <a:tcPr marL="64008" marR="64008" marT="41148" marB="41148" anchor="ctr">
+                    <a:solidFill>
+                      <a:srgbClr val="121821"/>
+                    </a:solidFill>
+                  </a:tcPr>
+                </a:tc>
+              </a:tr>
+              <a:tr h="205965">
+                <a:tc>
+                  <a:txBody>
+                    <a:bodyPr wrap="square"/>
+                    <a:lstStyle/>
+                    <a:p>
+                      <a:pPr>
+                        <a:lnSpc>
+                          <a:spcPct val="114000"/>
+                        </a:lnSpc>
+                      </a:pPr>
+                      <a:r>
+                        <a:rPr sz="850" b="1" i="0">
+                          <a:solidFill>
+                            <a:srgbClr val="F7F6EF"/>
+                          </a:solidFill>
+                          <a:latin typeface="Arial"/>
+                        </a:rPr>
+                        <a:t>market.us — fan engagement market</a:t>
+                      </a:r>
+                    </a:p>
+                  </a:txBody>
+                  <a:tcPr marL="64008" marR="64008" marT="41148" marB="41148" anchor="ctr">
+                    <a:solidFill>
+                      <a:srgbClr val="0D131B"/>
+                    </a:solidFill>
+                  </a:tcPr>
+                </a:tc>
+                <a:tc>
+                  <a:txBody>
+                    <a:bodyPr wrap="square"/>
+                    <a:lstStyle/>
+                    <a:p>
+                      <a:pPr>
+                        <a:lnSpc>
+                          <a:spcPct val="114000"/>
+                        </a:lnSpc>
+                      </a:pPr>
+                      <a:r>
+                        <a:rPr sz="850" b="0" i="0">
+                          <a:solidFill>
+                            <a:srgbClr val="F7F6EF"/>
+                          </a:solidFill>
+                          <a:latin typeface="Arial"/>
+                        </a:rPr>
+                        <a:t>third-party estimate</a:t>
+                      </a:r>
+                    </a:p>
+                  </a:txBody>
+                  <a:tcPr marL="64008" marR="64008" marT="41148" marB="41148" anchor="ctr">
+                    <a:solidFill>
+                      <a:srgbClr val="0D131B"/>
+                    </a:solidFill>
+                  </a:tcPr>
+                </a:tc>
+                <a:tc>
+                  <a:txBody>
+                    <a:bodyPr wrap="square"/>
+                    <a:lstStyle/>
+                    <a:p>
+                      <a:pPr>
+                        <a:lnSpc>
+                          <a:spcPct val="114000"/>
+                        </a:lnSpc>
+                      </a:pPr>
+                      <a:r>
+                        <a:rPr sz="850" b="0" i="0">
+                          <a:solidFill>
+                            <a:srgbClr val="F7F6EF"/>
+                          </a:solidFill>
+                          <a:latin typeface="Arial"/>
+                        </a:rPr>
+                        <a:t>14</a:t>
+                      </a:r>
+                    </a:p>
+                  </a:txBody>
+                  <a:tcPr marL="64008" marR="64008" marT="41148" marB="41148" anchor="ctr">
+                    <a:solidFill>
+                      <a:srgbClr val="0D131B"/>
+                    </a:solidFill>
+                  </a:tcPr>
+                </a:tc>
+              </a:tr>
+              <a:tr h="205965">
+                <a:tc>
+                  <a:txBody>
+                    <a:bodyPr wrap="square"/>
+                    <a:lstStyle/>
+                    <a:p>
+                      <a:pPr>
+                        <a:lnSpc>
+                          <a:spcPct val="114000"/>
+                        </a:lnSpc>
+                      </a:pPr>
+                      <a:r>
+                        <a:rPr sz="850" b="1" i="0">
                           <a:solidFill>
                             <a:srgbClr val="F7F6EF"/>
                           </a:solidFill>
@@ -26522,7 +26784,7 @@
                         </a:lnSpc>
                       </a:pPr>
                       <a:r>
-                        <a:rPr sz="1000" b="0" i="0">
+                        <a:rPr sz="850" b="0" i="0">
                           <a:solidFill>
                             <a:srgbClr val="F7F6EF"/>
                           </a:solidFill>
@@ -26549,7 +26811,7 @@
                         </a:lnSpc>
                       </a:pPr>
                       <a:r>
-                        <a:rPr sz="1000" b="0" i="0">
+                        <a:rPr sz="850" b="0" i="0">
                           <a:solidFill>
                             <a:srgbClr val="F7F6EF"/>
                           </a:solidFill>
@@ -26566,19 +26828,19 @@
                   </a:tcPr>
                 </a:tc>
               </a:tr>
-              <a:tr h="231711">
-                <a:tc>
-                  <a:txBody>
-                    <a:bodyPr wrap="square"/>
-                    <a:lstStyle/>
-                    <a:p>
-                      <a:pPr>
-                        <a:lnSpc>
-                          <a:spcPct val="114000"/>
-                        </a:lnSpc>
-                      </a:pPr>
-                      <a:r>
-                        <a:rPr sz="1000" b="1" i="0">
+              <a:tr h="205965">
+                <a:tc>
+                  <a:txBody>
+                    <a:bodyPr wrap="square"/>
+                    <a:lstStyle/>
+                    <a:p>
+                      <a:pPr>
+                        <a:lnSpc>
+                          <a:spcPct val="114000"/>
+                        </a:lnSpc>
+                      </a:pPr>
+                      <a:r>
+                        <a:rPr sz="850" b="1" i="0">
                           <a:solidFill>
                             <a:srgbClr val="F7F6EF"/>
                           </a:solidFill>
@@ -26605,7 +26867,7 @@
                         </a:lnSpc>
                       </a:pPr>
                       <a:r>
-                        <a:rPr sz="1000" b="0" i="0">
+                        <a:rPr sz="850" b="0" i="0">
                           <a:solidFill>
                             <a:srgbClr val="F7F6EF"/>
                           </a:solidFill>
@@ -26632,7 +26894,7 @@
                         </a:lnSpc>
                       </a:pPr>
                       <a:r>
-                        <a:rPr sz="1000" b="0" i="0">
+                        <a:rPr sz="850" b="0" i="0">
                           <a:solidFill>
                             <a:srgbClr val="F7F6EF"/>
                           </a:solidFill>
@@ -26649,19 +26911,19 @@
                   </a:tcPr>
                 </a:tc>
               </a:tr>
-              <a:tr h="231711">
-                <a:tc>
-                  <a:txBody>
-                    <a:bodyPr wrap="square"/>
-                    <a:lstStyle/>
-                    <a:p>
-                      <a:pPr>
-                        <a:lnSpc>
-                          <a:spcPct val="114000"/>
-                        </a:lnSpc>
-                      </a:pPr>
-                      <a:r>
-                        <a:rPr sz="1000" b="1" i="0">
+              <a:tr h="205965">
+                <a:tc>
+                  <a:txBody>
+                    <a:bodyPr wrap="square"/>
+                    <a:lstStyle/>
+                    <a:p>
+                      <a:pPr>
+                        <a:lnSpc>
+                          <a:spcPct val="114000"/>
+                        </a:lnSpc>
+                      </a:pPr>
+                      <a:r>
+                        <a:rPr sz="850" b="1" i="0">
                           <a:solidFill>
                             <a:srgbClr val="F7F6EF"/>
                           </a:solidFill>
@@ -26688,7 +26950,7 @@
                         </a:lnSpc>
                       </a:pPr>
                       <a:r>
-                        <a:rPr sz="1000" b="0" i="0">
+                        <a:rPr sz="850" b="0" i="0">
                           <a:solidFill>
                             <a:srgbClr val="F7F6EF"/>
                           </a:solidFill>
@@ -26715,7 +26977,7 @@
                         </a:lnSpc>
                       </a:pPr>
                       <a:r>
-                        <a:rPr sz="1000" b="0" i="0">
+                        <a:rPr sz="850" b="0" i="0">
                           <a:solidFill>
                             <a:srgbClr val="F7F6EF"/>
                           </a:solidFill>
@@ -26732,19 +26994,19 @@
                   </a:tcPr>
                 </a:tc>
               </a:tr>
-              <a:tr h="231711">
-                <a:tc>
-                  <a:txBody>
-                    <a:bodyPr wrap="square"/>
-                    <a:lstStyle/>
-                    <a:p>
-                      <a:pPr>
-                        <a:lnSpc>
-                          <a:spcPct val="114000"/>
-                        </a:lnSpc>
-                      </a:pPr>
-                      <a:r>
-                        <a:rPr sz="1000" b="1" i="0">
+              <a:tr h="205965">
+                <a:tc>
+                  <a:txBody>
+                    <a:bodyPr wrap="square"/>
+                    <a:lstStyle/>
+                    <a:p>
+                      <a:pPr>
+                        <a:lnSpc>
+                          <a:spcPct val="114000"/>
+                        </a:lnSpc>
+                      </a:pPr>
+                      <a:r>
+                        <a:rPr sz="850" b="1" i="0">
                           <a:solidFill>
                             <a:srgbClr val="F7F6EF"/>
                           </a:solidFill>
@@ -26771,7 +27033,7 @@
                         </a:lnSpc>
                       </a:pPr>
                       <a:r>
-                        <a:rPr sz="1000" b="0" i="0">
+                        <a:rPr sz="850" b="0" i="0">
                           <a:solidFill>
                             <a:srgbClr val="F7F6EF"/>
                           </a:solidFill>
@@ -26798,7 +27060,7 @@
                         </a:lnSpc>
                       </a:pPr>
                       <a:r>
-                        <a:rPr sz="1000" b="0" i="0">
+                        <a:rPr sz="850" b="0" i="0">
                           <a:solidFill>
                             <a:srgbClr val="F7F6EF"/>
                           </a:solidFill>
@@ -26815,19 +27077,19 @@
                   </a:tcPr>
                 </a:tc>
               </a:tr>
-              <a:tr h="231711">
-                <a:tc>
-                  <a:txBody>
-                    <a:bodyPr wrap="square"/>
-                    <a:lstStyle/>
-                    <a:p>
-                      <a:pPr>
-                        <a:lnSpc>
-                          <a:spcPct val="114000"/>
-                        </a:lnSpc>
-                      </a:pPr>
-                      <a:r>
-                        <a:rPr sz="1000" b="1" i="0">
+              <a:tr h="205965">
+                <a:tc>
+                  <a:txBody>
+                    <a:bodyPr wrap="square"/>
+                    <a:lstStyle/>
+                    <a:p>
+                      <a:pPr>
+                        <a:lnSpc>
+                          <a:spcPct val="114000"/>
+                        </a:lnSpc>
+                      </a:pPr>
+                      <a:r>
+                        <a:rPr sz="850" b="1" i="0">
                           <a:solidFill>
                             <a:srgbClr val="F7F6EF"/>
                           </a:solidFill>
@@ -26854,7 +27116,7 @@
                         </a:lnSpc>
                       </a:pPr>
                       <a:r>
-                        <a:rPr sz="1000" b="0" i="0">
+                        <a:rPr sz="850" b="0" i="0">
                           <a:solidFill>
                             <a:srgbClr val="F7F6EF"/>
                           </a:solidFill>
@@ -26881,7 +27143,7 @@
                         </a:lnSpc>
                       </a:pPr>
                       <a:r>
-                        <a:rPr sz="1000" b="0" i="0">
+                        <a:rPr sz="850" b="0" i="0">
                           <a:solidFill>
                             <a:srgbClr val="F7F6EF"/>
                           </a:solidFill>
@@ -26898,19 +27160,19 @@
                   </a:tcPr>
                 </a:tc>
               </a:tr>
-              <a:tr h="231711">
-                <a:tc>
-                  <a:txBody>
-                    <a:bodyPr wrap="square"/>
-                    <a:lstStyle/>
-                    <a:p>
-                      <a:pPr>
-                        <a:lnSpc>
-                          <a:spcPct val="114000"/>
-                        </a:lnSpc>
-                      </a:pPr>
-                      <a:r>
-                        <a:rPr sz="1000" b="1" i="0">
+              <a:tr h="205965">
+                <a:tc>
+                  <a:txBody>
+                    <a:bodyPr wrap="square"/>
+                    <a:lstStyle/>
+                    <a:p>
+                      <a:pPr>
+                        <a:lnSpc>
+                          <a:spcPct val="114000"/>
+                        </a:lnSpc>
+                      </a:pPr>
+                      <a:r>
+                        <a:rPr sz="850" b="1" i="0">
                           <a:solidFill>
                             <a:srgbClr val="F7F6EF"/>
                           </a:solidFill>
@@ -26937,7 +27199,7 @@
                         </a:lnSpc>
                       </a:pPr>
                       <a:r>
-                        <a:rPr sz="1000" b="0" i="0">
+                        <a:rPr sz="850" b="0" i="0">
                           <a:solidFill>
                             <a:srgbClr val="F7F6EF"/>
                           </a:solidFill>
@@ -26964,7 +27226,7 @@
                         </a:lnSpc>
                       </a:pPr>
                       <a:r>
-                        <a:rPr sz="1000" b="0" i="0">
+                        <a:rPr sz="850" b="0" i="0">
                           <a:solidFill>
                             <a:srgbClr val="F7F6EF"/>
                           </a:solidFill>
@@ -26981,19 +27243,19 @@
                   </a:tcPr>
                 </a:tc>
               </a:tr>
-              <a:tr h="231711">
-                <a:tc>
-                  <a:txBody>
-                    <a:bodyPr wrap="square"/>
-                    <a:lstStyle/>
-                    <a:p>
-                      <a:pPr>
-                        <a:lnSpc>
-                          <a:spcPct val="114000"/>
-                        </a:lnSpc>
-                      </a:pPr>
-                      <a:r>
-                        <a:rPr sz="1000" b="1" i="0">
+              <a:tr h="205965">
+                <a:tc>
+                  <a:txBody>
+                    <a:bodyPr wrap="square"/>
+                    <a:lstStyle/>
+                    <a:p>
+                      <a:pPr>
+                        <a:lnSpc>
+                          <a:spcPct val="114000"/>
+                        </a:lnSpc>
+                      </a:pPr>
+                      <a:r>
+                        <a:rPr sz="850" b="1" i="0">
                           <a:solidFill>
                             <a:srgbClr val="F7F6EF"/>
                           </a:solidFill>
@@ -27020,7 +27282,7 @@
                         </a:lnSpc>
                       </a:pPr>
                       <a:r>
-                        <a:rPr sz="1000" b="0" i="0">
+                        <a:rPr sz="850" b="0" i="0">
                           <a:solidFill>
                             <a:srgbClr val="F7F6EF"/>
                           </a:solidFill>
@@ -27047,7 +27309,7 @@
                         </a:lnSpc>
                       </a:pPr>
                       <a:r>
-                        <a:rPr sz="1000" b="0" i="0">
+                        <a:rPr sz="850" b="0" i="0">
                           <a:solidFill>
                             <a:srgbClr val="F7F6EF"/>
                           </a:solidFill>
@@ -27064,19 +27326,19 @@
                   </a:tcPr>
                 </a:tc>
               </a:tr>
-              <a:tr h="231711">
-                <a:tc>
-                  <a:txBody>
-                    <a:bodyPr wrap="square"/>
-                    <a:lstStyle/>
-                    <a:p>
-                      <a:pPr>
-                        <a:lnSpc>
-                          <a:spcPct val="114000"/>
-                        </a:lnSpc>
-                      </a:pPr>
-                      <a:r>
-                        <a:rPr sz="1000" b="1" i="0">
+              <a:tr h="205965">
+                <a:tc>
+                  <a:txBody>
+                    <a:bodyPr wrap="square"/>
+                    <a:lstStyle/>
+                    <a:p>
+                      <a:pPr>
+                        <a:lnSpc>
+                          <a:spcPct val="114000"/>
+                        </a:lnSpc>
+                      </a:pPr>
+                      <a:r>
+                        <a:rPr sz="850" b="1" i="0">
                           <a:solidFill>
                             <a:srgbClr val="F7F6EF"/>
                           </a:solidFill>
@@ -27103,7 +27365,7 @@
                         </a:lnSpc>
                       </a:pPr>
                       <a:r>
-                        <a:rPr sz="1000" b="0" i="0">
+                        <a:rPr sz="850" b="0" i="0">
                           <a:solidFill>
                             <a:srgbClr val="F7F6EF"/>
                           </a:solidFill>
@@ -27130,7 +27392,7 @@
                         </a:lnSpc>
                       </a:pPr>
                       <a:r>
-                        <a:rPr sz="1000" b="0" i="0">
+                        <a:rPr sz="850" b="0" i="0">
                           <a:solidFill>
                             <a:srgbClr val="F7F6EF"/>
                           </a:solidFill>
@@ -27147,19 +27409,19 @@
                   </a:tcPr>
                 </a:tc>
               </a:tr>
-              <a:tr h="231711">
-                <a:tc>
-                  <a:txBody>
-                    <a:bodyPr wrap="square"/>
-                    <a:lstStyle/>
-                    <a:p>
-                      <a:pPr>
-                        <a:lnSpc>
-                          <a:spcPct val="114000"/>
-                        </a:lnSpc>
-                      </a:pPr>
-                      <a:r>
-                        <a:rPr sz="1000" b="1" i="0">
+              <a:tr h="205965">
+                <a:tc>
+                  <a:txBody>
+                    <a:bodyPr wrap="square"/>
+                    <a:lstStyle/>
+                    <a:p>
+                      <a:pPr>
+                        <a:lnSpc>
+                          <a:spcPct val="114000"/>
+                        </a:lnSpc>
+                      </a:pPr>
+                      <a:r>
+                        <a:rPr sz="850" b="1" i="0">
                           <a:solidFill>
                             <a:srgbClr val="F7F6EF"/>
                           </a:solidFill>
@@ -27186,7 +27448,7 @@
                         </a:lnSpc>
                       </a:pPr>
                       <a:r>
-                        <a:rPr sz="1000" b="0" i="0">
+                        <a:rPr sz="850" b="0" i="0">
                           <a:solidFill>
                             <a:srgbClr val="F7F6EF"/>
                           </a:solidFill>
@@ -27213,7 +27475,7 @@
                         </a:lnSpc>
                       </a:pPr>
                       <a:r>
-                        <a:rPr sz="1000" b="0" i="0">
+                        <a:rPr sz="850" b="0" i="0">
                           <a:solidFill>
                             <a:srgbClr val="F7F6EF"/>
                           </a:solidFill>
@@ -27230,19 +27492,19 @@
                   </a:tcPr>
                 </a:tc>
               </a:tr>
-              <a:tr h="231711">
-                <a:tc>
-                  <a:txBody>
-                    <a:bodyPr wrap="square"/>
-                    <a:lstStyle/>
-                    <a:p>
-                      <a:pPr>
-                        <a:lnSpc>
-                          <a:spcPct val="114000"/>
-                        </a:lnSpc>
-                      </a:pPr>
-                      <a:r>
-                        <a:rPr sz="1000" b="1" i="0">
+              <a:tr h="205965">
+                <a:tc>
+                  <a:txBody>
+                    <a:bodyPr wrap="square"/>
+                    <a:lstStyle/>
+                    <a:p>
+                      <a:pPr>
+                        <a:lnSpc>
+                          <a:spcPct val="114000"/>
+                        </a:lnSpc>
+                      </a:pPr>
+                      <a:r>
+                        <a:rPr sz="850" b="1" i="0">
                           <a:solidFill>
                             <a:srgbClr val="F7F6EF"/>
                           </a:solidFill>
@@ -27269,7 +27531,7 @@
                         </a:lnSpc>
                       </a:pPr>
                       <a:r>
-                        <a:rPr sz="1000" b="0" i="0">
+                        <a:rPr sz="850" b="0" i="0">
                           <a:solidFill>
                             <a:srgbClr val="F7F6EF"/>
                           </a:solidFill>
@@ -27296,7 +27558,7 @@
                         </a:lnSpc>
                       </a:pPr>
                       <a:r>
-                        <a:rPr sz="1000" b="0" i="0">
+                        <a:rPr sz="850" b="0" i="0">
                           <a:solidFill>
                             <a:srgbClr val="F7F6EF"/>
                           </a:solidFill>
@@ -27313,19 +27575,19 @@
                   </a:tcPr>
                 </a:tc>
               </a:tr>
-              <a:tr h="231711">
-                <a:tc>
-                  <a:txBody>
-                    <a:bodyPr wrap="square"/>
-                    <a:lstStyle/>
-                    <a:p>
-                      <a:pPr>
-                        <a:lnSpc>
-                          <a:spcPct val="114000"/>
-                        </a:lnSpc>
-                      </a:pPr>
-                      <a:r>
-                        <a:rPr sz="1000" b="1" i="0">
+              <a:tr h="205965">
+                <a:tc>
+                  <a:txBody>
+                    <a:bodyPr wrap="square"/>
+                    <a:lstStyle/>
+                    <a:p>
+                      <a:pPr>
+                        <a:lnSpc>
+                          <a:spcPct val="114000"/>
+                        </a:lnSpc>
+                      </a:pPr>
+                      <a:r>
+                        <a:rPr sz="850" b="1" i="0">
                           <a:solidFill>
                             <a:srgbClr val="F7F6EF"/>
                           </a:solidFill>
@@ -27352,7 +27614,7 @@
                         </a:lnSpc>
                       </a:pPr>
                       <a:r>
-                        <a:rPr sz="1000" b="0" i="0">
+                        <a:rPr sz="850" b="0" i="0">
                           <a:solidFill>
                             <a:srgbClr val="F7F6EF"/>
                           </a:solidFill>
@@ -27379,7 +27641,7 @@
                         </a:lnSpc>
                       </a:pPr>
                       <a:r>
-                        <a:rPr sz="1000" b="0" i="0">
+                        <a:rPr sz="850" b="0" i="0">
                           <a:solidFill>
                             <a:srgbClr val="F7F6EF"/>
                           </a:solidFill>
@@ -27396,19 +27658,19 @@
                   </a:tcPr>
                 </a:tc>
               </a:tr>
-              <a:tr h="231711">
-                <a:tc>
-                  <a:txBody>
-                    <a:bodyPr wrap="square"/>
-                    <a:lstStyle/>
-                    <a:p>
-                      <a:pPr>
-                        <a:lnSpc>
-                          <a:spcPct val="114000"/>
-                        </a:lnSpc>
-                      </a:pPr>
-                      <a:r>
-                        <a:rPr sz="1000" b="1" i="0">
+              <a:tr h="205965">
+                <a:tc>
+                  <a:txBody>
+                    <a:bodyPr wrap="square"/>
+                    <a:lstStyle/>
+                    <a:p>
+                      <a:pPr>
+                        <a:lnSpc>
+                          <a:spcPct val="114000"/>
+                        </a:lnSpc>
+                      </a:pPr>
+                      <a:r>
+                        <a:rPr sz="850" b="1" i="0">
                           <a:solidFill>
                             <a:srgbClr val="F7F6EF"/>
                           </a:solidFill>
@@ -27435,7 +27697,7 @@
                         </a:lnSpc>
                       </a:pPr>
                       <a:r>
-                        <a:rPr sz="1000" b="0" i="0">
+                        <a:rPr sz="850" b="0" i="0">
                           <a:solidFill>
                             <a:srgbClr val="F7F6EF"/>
                           </a:solidFill>
@@ -27462,7 +27724,7 @@
                         </a:lnSpc>
                       </a:pPr>
                       <a:r>
-                        <a:rPr sz="1000" b="0" i="0">
+                        <a:rPr sz="850" b="0" i="0">
                           <a:solidFill>
                             <a:srgbClr val="F7F6EF"/>
                           </a:solidFill>
@@ -27479,19 +27741,19 @@
                   </a:tcPr>
                 </a:tc>
               </a:tr>
-              <a:tr h="231711">
-                <a:tc>
-                  <a:txBody>
-                    <a:bodyPr wrap="square"/>
-                    <a:lstStyle/>
-                    <a:p>
-                      <a:pPr>
-                        <a:lnSpc>
-                          <a:spcPct val="114000"/>
-                        </a:lnSpc>
-                      </a:pPr>
-                      <a:r>
-                        <a:rPr sz="1000" b="1" i="0">
+              <a:tr h="205965">
+                <a:tc>
+                  <a:txBody>
+                    <a:bodyPr wrap="square"/>
+                    <a:lstStyle/>
+                    <a:p>
+                      <a:pPr>
+                        <a:lnSpc>
+                          <a:spcPct val="114000"/>
+                        </a:lnSpc>
+                      </a:pPr>
+                      <a:r>
+                        <a:rPr sz="850" b="1" i="0">
                           <a:solidFill>
                             <a:srgbClr val="F7F6EF"/>
                           </a:solidFill>
@@ -27518,7 +27780,7 @@
                         </a:lnSpc>
                       </a:pPr>
                       <a:r>
-                        <a:rPr sz="1000" b="0" i="0">
+                        <a:rPr sz="850" b="0" i="0">
                           <a:solidFill>
                             <a:srgbClr val="F7F6EF"/>
                           </a:solidFill>
@@ -27545,7 +27807,7 @@
                         </a:lnSpc>
                       </a:pPr>
                       <a:r>
-                        <a:rPr sz="1000" b="0" i="0">
+                        <a:rPr sz="850" b="0" i="0">
                           <a:solidFill>
                             <a:srgbClr val="F7F6EF"/>
                           </a:solidFill>
@@ -27562,19 +27824,19 @@
                   </a:tcPr>
                 </a:tc>
               </a:tr>
-              <a:tr h="231711">
-                <a:tc>
-                  <a:txBody>
-                    <a:bodyPr wrap="square"/>
-                    <a:lstStyle/>
-                    <a:p>
-                      <a:pPr>
-                        <a:lnSpc>
-                          <a:spcPct val="114000"/>
-                        </a:lnSpc>
-                      </a:pPr>
-                      <a:r>
-                        <a:rPr sz="1000" b="1" i="0">
+              <a:tr h="205965">
+                <a:tc>
+                  <a:txBody>
+                    <a:bodyPr wrap="square"/>
+                    <a:lstStyle/>
+                    <a:p>
+                      <a:pPr>
+                        <a:lnSpc>
+                          <a:spcPct val="114000"/>
+                        </a:lnSpc>
+                      </a:pPr>
+                      <a:r>
+                        <a:rPr sz="850" b="1" i="0">
                           <a:solidFill>
                             <a:srgbClr val="F7F6EF"/>
                           </a:solidFill>
@@ -27601,7 +27863,7 @@
                         </a:lnSpc>
                       </a:pPr>
                       <a:r>
-                        <a:rPr sz="1000" b="0" i="0">
+                        <a:rPr sz="850" b="0" i="0">
                           <a:solidFill>
                             <a:srgbClr val="F7F6EF"/>
                           </a:solidFill>
@@ -27628,7 +27890,7 @@
                         </a:lnSpc>
                       </a:pPr>
                       <a:r>
-                        <a:rPr sz="1000" b="0" i="0">
+                        <a:rPr sz="850" b="0" i="0">
                           <a:solidFill>
                             <a:srgbClr val="F7F6EF"/>
                           </a:solidFill>
@@ -27645,19 +27907,19 @@
                   </a:tcPr>
                 </a:tc>
               </a:tr>
-              <a:tr h="231711">
-                <a:tc>
-                  <a:txBody>
-                    <a:bodyPr wrap="square"/>
-                    <a:lstStyle/>
-                    <a:p>
-                      <a:pPr>
-                        <a:lnSpc>
-                          <a:spcPct val="114000"/>
-                        </a:lnSpc>
-                      </a:pPr>
-                      <a:r>
-                        <a:rPr sz="1000" b="1" i="0">
+              <a:tr h="205965">
+                <a:tc>
+                  <a:txBody>
+                    <a:bodyPr wrap="square"/>
+                    <a:lstStyle/>
+                    <a:p>
+                      <a:pPr>
+                        <a:lnSpc>
+                          <a:spcPct val="114000"/>
+                        </a:lnSpc>
+                      </a:pPr>
+                      <a:r>
+                        <a:rPr sz="850" b="1" i="0">
                           <a:solidFill>
                             <a:srgbClr val="F7F6EF"/>
                           </a:solidFill>
@@ -27684,7 +27946,7 @@
                         </a:lnSpc>
                       </a:pPr>
                       <a:r>
-                        <a:rPr sz="1000" b="0" i="0">
+                        <a:rPr sz="850" b="0" i="0">
                           <a:solidFill>
                             <a:srgbClr val="F7F6EF"/>
                           </a:solidFill>
@@ -27711,7 +27973,7 @@
                         </a:lnSpc>
                       </a:pPr>
                       <a:r>
-                        <a:rPr sz="1000" b="0" i="0">
+                        <a:rPr sz="850" b="0" i="0">
                           <a:solidFill>
                             <a:srgbClr val="F7F6EF"/>
                           </a:solidFill>
@@ -30422,7 +30684,7 @@
                 </a:solidFill>
                 <a:latin typeface="Arial"/>
               </a:rPr>
-              <a:t>We model on Duolingo's habit-subscription economics, not consumer trivia IAP.</a:t>
+              <a:t>Two monetisation routes, both unbuilt: paid event entry, and a habit subscription.</a:t>
             </a:r>
           </a:p>
         </p:txBody>
@@ -30604,7 +30866,7 @@
                 </a:solidFill>
                 <a:latin typeface="Arial"/>
               </a:rPr>
-              <a:t>GameAnalytics — 2026 Mobile &amp; PC Gaming Benchmarks  ·  FACT//DUEL internal — numbers.md §4.1-§4.3</a:t>
+              <a:t>GameAnalytics — 2026 Mobile &amp; PC Gaming Benchmarks  ·  FACT//DUEL internal — numbers.md §4.1-§4.3  ·  +1 more in the speaker notes and the source register</a:t>
             </a:r>
           </a:p>
         </p:txBody>
@@ -30631,7 +30893,7 @@
           </a:bodyPr>
           <a:lstStyle/>
           <a:p>
-            <a:pPr marL="264121" indent="-264121">
+            <a:pPr marL="247088" indent="-247088">
               <a:lnSpc>
                 <a:spcPct val="116000"/>
               </a:lnSpc>
@@ -30642,58 +30904,40 @@
               <a:buChar char="—"/>
             </a:pPr>
             <a:r>
-              <a:rPr sz="1550" b="0" i="0">
+              <a:rPr sz="1450" b="0" i="0">
                 <a:solidFill>
                   <a:srgbClr val="F7F6EF"/>
                 </a:solidFill>
                 <a:latin typeface="Arial"/>
               </a:rPr>
-              <a:t>Trivia IAP, US iOS top three: ~</a:t>
-            </a:r>
-            <a:r>
-              <a:rPr sz="1550" b="0" i="0">
-                <a:solidFill>
-                  <a:srgbClr val="FFC83D"/>
-                </a:solidFill>
-                <a:latin typeface="Arial"/>
-              </a:rPr>
-              <a:t>$102.5K</a:t>
-            </a:r>
-            <a:r>
-              <a:rPr sz="1550" b="0" i="0">
+              <a:t>Route A </a:t>
+            </a:r>
+            <a:r>
+              <a:rPr sz="1450" b="1" i="0">
+                <a:solidFill>
+                  <a:srgbClr val="4EE1FF"/>
+                </a:solidFill>
+                <a:latin typeface="Arial"/>
+              </a:rPr>
+              <a:t>(P)</a:t>
+            </a:r>
+            <a:r>
+              <a:rPr sz="1450" b="0" i="0">
                 <a:solidFill>
                   <a:srgbClr val="F7F6EF"/>
                 </a:solidFill>
                 <a:latin typeface="Arial"/>
               </a:rPr>
-              <a:t>/week peak Q2 2025, ~</a:t>
-            </a:r>
-            <a:r>
-              <a:rPr sz="1550" b="0" i="0">
-                <a:solidFill>
-                  <a:srgbClr val="FFC83D"/>
-                </a:solidFill>
-                <a:latin typeface="Arial"/>
-              </a:rPr>
-              <a:t>$90K</a:t>
-            </a:r>
-            <a:r>
-              <a:rPr sz="1550" b="0" i="0">
-                <a:solidFill>
-                  <a:srgbClr val="F7F6EF"/>
-                </a:solidFill>
-                <a:latin typeface="Arial"/>
-              </a:rPr>
-              <a:t> quarter-end — Sensor Tower's modelled estimate, before Apple's 15-30% cut.</a:t>
-            </a:r>
-          </a:p>
-          <a:p>
-            <a:pPr marL="264121" indent="-264121">
+              <a:t> — paid entry to a time-limited expedition event: one entry per player, rotating question set.</a:t>
+            </a:r>
+          </a:p>
+          <a:p>
+            <a:pPr marL="247088" indent="-247088">
               <a:lnSpc>
                 <a:spcPct val="116000"/>
               </a:lnSpc>
               <a:spcBef>
-                <a:spcPts val="852"/>
+                <a:spcPts val="797"/>
               </a:spcBef>
               <a:buClr>
                 <a:srgbClr val="D4FF3A"/>
@@ -30702,40 +30946,22 @@
               <a:buChar char="—"/>
             </a:pPr>
             <a:r>
-              <a:rPr sz="1550" b="0" i="0">
+              <a:rPr sz="1450" b="0" i="0">
                 <a:solidFill>
                   <a:srgbClr val="F7F6EF"/>
                 </a:solidFill>
                 <a:latin typeface="Arial"/>
               </a:rPr>
-              <a:t>Duolingo: </a:t>
-            </a:r>
-            <a:r>
-              <a:rPr sz="1550" b="0" i="0">
-                <a:solidFill>
-                  <a:srgbClr val="FFC83D"/>
-                </a:solidFill>
-                <a:latin typeface="Arial"/>
-              </a:rPr>
-              <a:t>$1,037.6M</a:t>
-            </a:r>
-            <a:r>
-              <a:rPr sz="1550" b="0" i="0">
-                <a:solidFill>
-                  <a:srgbClr val="F7F6EF"/>
-                </a:solidFill>
-                <a:latin typeface="Arial"/>
-              </a:rPr>
-              <a:t> FY2025 revenue on a streak-and-quest loop. A later period, 30 Jun 2026: 12.7M of 140.6M MAU paid, 9.03%.</a:t>
-            </a:r>
-          </a:p>
-          <a:p>
-            <a:pPr marL="264121" indent="-264121">
+              <a:t>Nothing of Route A exists. No payment surface, no accounts, and expeditions today are free and replayable.</a:t>
+            </a:r>
+          </a:p>
+          <a:p>
+            <a:pPr marL="247088" indent="-247088">
               <a:lnSpc>
                 <a:spcPct val="116000"/>
               </a:lnSpc>
               <a:spcBef>
-                <a:spcPts val="852"/>
+                <a:spcPts val="797"/>
               </a:spcBef>
               <a:buClr>
                 <a:srgbClr val="D4FF3A"/>
@@ -30744,112 +30970,58 @@
               <a:buChar char="—"/>
             </a:pPr>
             <a:r>
-              <a:rPr sz="1550" b="0" i="0">
+              <a:rPr sz="1450" b="0" i="0">
                 <a:solidFill>
                   <a:srgbClr val="F7F6EF"/>
                 </a:solidFill>
                 <a:latin typeface="Arial"/>
               </a:rPr>
-              <a:t>Cross-check at base-case Year-3 scale: 105,900 MAU x 9.03% x </a:t>
-            </a:r>
-            <a:r>
-              <a:rPr sz="1550" b="0" i="0">
+              <a:t>Route B </a:t>
+            </a:r>
+            <a:r>
+              <a:rPr sz="1450" b="1" i="0">
+                <a:solidFill>
+                  <a:srgbClr val="4EE1FF"/>
+                </a:solidFill>
+                <a:latin typeface="Arial"/>
+              </a:rPr>
+              <a:t>(P)</a:t>
+            </a:r>
+            <a:r>
+              <a:rPr sz="1450" b="0" i="0">
+                <a:solidFill>
+                  <a:srgbClr val="F7F6EF"/>
+                </a:solidFill>
+                <a:latin typeface="Arial"/>
+              </a:rPr>
+              <a:t> — habit subscription. Duolingo: </a:t>
+            </a:r>
+            <a:r>
+              <a:rPr sz="1450" b="0" i="0">
                 <a:solidFill>
                   <a:srgbClr val="FFC83D"/>
                 </a:solidFill>
                 <a:latin typeface="Arial"/>
               </a:rPr>
-              <a:t>$43.99</a:t>
-            </a:r>
-            <a:r>
-              <a:rPr sz="1550" b="0" i="0">
+              <a:t>$1,037.6M</a:t>
+            </a:r>
+            <a:r>
+              <a:rPr sz="1450" b="0" i="0">
                 <a:solidFill>
                   <a:srgbClr val="F7F6EF"/>
                 </a:solidFill>
                 <a:latin typeface="Arial"/>
               </a:rPr>
-              <a:t>/yr = </a:t>
-            </a:r>
-            <a:r>
-              <a:rPr sz="1550" b="0" i="0">
-                <a:solidFill>
-                  <a:srgbClr val="FFC83D"/>
-                </a:solidFill>
-                <a:latin typeface="Arial"/>
-              </a:rPr>
-              <a:t>$420,666</a:t>
-            </a:r>
-            <a:r>
-              <a:rPr sz="1550" b="0" i="0">
-                <a:solidFill>
-                  <a:srgbClr val="F7F6EF"/>
-                </a:solidFill>
-                <a:latin typeface="Arial"/>
-              </a:rPr>
-              <a:t> </a:t>
-            </a:r>
-            <a:r>
-              <a:rPr sz="1550" b="1" i="0">
-                <a:solidFill>
-                  <a:srgbClr val="4EE1FF"/>
-                </a:solidFill>
-                <a:latin typeface="Arial"/>
-              </a:rPr>
-              <a:t>(P)</a:t>
-            </a:r>
-            <a:r>
-              <a:rPr sz="1550" b="0" i="0">
-                <a:solidFill>
-                  <a:srgbClr val="F7F6EF"/>
-                </a:solidFill>
-                <a:latin typeface="Arial"/>
-              </a:rPr>
-              <a:t>, versus </a:t>
-            </a:r>
-            <a:r>
-              <a:rPr sz="1550" b="0" i="0">
-                <a:solidFill>
-                  <a:srgbClr val="FFC83D"/>
-                </a:solidFill>
-                <a:latin typeface="Arial"/>
-              </a:rPr>
-              <a:t>$1,630,517</a:t>
-            </a:r>
-            <a:r>
-              <a:rPr sz="1550" b="0" i="0">
-                <a:solidFill>
-                  <a:srgbClr val="F7F6EF"/>
-                </a:solidFill>
-                <a:latin typeface="Arial"/>
-              </a:rPr>
-              <a:t> </a:t>
-            </a:r>
-            <a:r>
-              <a:rPr sz="1550" b="1" i="0">
-                <a:solidFill>
-                  <a:srgbClr val="4EE1FF"/>
-                </a:solidFill>
-                <a:latin typeface="Arial"/>
-              </a:rPr>
-              <a:t>(P)</a:t>
-            </a:r>
-            <a:r>
-              <a:rPr sz="1550" b="0" i="0">
-                <a:solidFill>
-                  <a:srgbClr val="F7F6EF"/>
-                </a:solidFill>
-                <a:latin typeface="Arial"/>
-              </a:rPr>
-              <a:t> from install economics.</a:t>
-            </a:r>
-          </a:p>
-          <a:p>
-            <a:pPr marL="264121" indent="-264121">
+              <a:t> FY2025 on a streak loop; 12.7M of 140.6M MAU paid, 9.03%.</a:t>
+            </a:r>
+          </a:p>
+          <a:p>
+            <a:pPr marL="247088" indent="-247088">
               <a:lnSpc>
                 <a:spcPct val="116000"/>
               </a:lnSpc>
               <a:spcBef>
-                <a:spcPts val="852"/>
+                <a:spcPts val="797"/>
               </a:spcBef>
               <a:buClr>
                 <a:srgbClr val="D4FF3A"/>
@@ -30858,43 +31030,43 @@
               <a:buChar char="—"/>
             </a:pPr>
             <a:r>
-              <a:rPr sz="1550" b="0" i="0">
+              <a:rPr sz="1450" b="0" i="0">
                 <a:solidFill>
                   <a:srgbClr val="F7F6EF"/>
                 </a:solidFill>
                 <a:latin typeface="Arial"/>
               </a:rPr>
-              <a:t>Diverging 3.88x, the base case's Year-3 revenue is a band — </a:t>
-            </a:r>
-            <a:r>
-              <a:rPr sz="1550" b="0" i="0">
+              <a:t>Cross-check at base-case Year-3 scale: 105,900 MAU x 9.03% x </a:t>
+            </a:r>
+            <a:r>
+              <a:rPr sz="1450" b="0" i="0">
                 <a:solidFill>
                   <a:srgbClr val="FFC83D"/>
                 </a:solidFill>
                 <a:latin typeface="Arial"/>
               </a:rPr>
-              <a:t>$0.4M</a:t>
-            </a:r>
-            <a:r>
-              <a:rPr sz="1550" b="0" i="0">
+              <a:t>$43.99</a:t>
+            </a:r>
+            <a:r>
+              <a:rPr sz="1450" b="0" i="0">
                 <a:solidFill>
                   <a:srgbClr val="F7F6EF"/>
                 </a:solidFill>
                 <a:latin typeface="Arial"/>
               </a:rPr>
-              <a:t>-</a:t>
-            </a:r>
-            <a:r>
-              <a:rPr sz="1550" b="0" i="0">
+              <a:t>/yr = </a:t>
+            </a:r>
+            <a:r>
+              <a:rPr sz="1450" b="0" i="0">
                 <a:solidFill>
                   <a:srgbClr val="FFC83D"/>
                 </a:solidFill>
                 <a:latin typeface="Arial"/>
               </a:rPr>
-              <a:t>$1.6M</a:t>
-            </a:r>
-            <a:r>
-              <a:rPr sz="1550" b="0" i="0">
+              <a:t>$420,666</a:t>
+            </a:r>
+            <a:r>
+              <a:rPr sz="1450" b="0" i="0">
                 <a:solidFill>
                   <a:srgbClr val="F7F6EF"/>
                 </a:solidFill>
@@ -30903,7 +31075,7 @@
               <a:t> </a:t>
             </a:r>
             <a:r>
-              <a:rPr sz="1550" b="1" i="0">
+              <a:rPr sz="1450" b="1" i="0">
                 <a:solidFill>
                   <a:srgbClr val="4EE1FF"/>
                 </a:solidFill>
@@ -30912,40 +31084,58 @@
               <a:t>(P)</a:t>
             </a:r>
             <a:r>
-              <a:rPr sz="1550" b="0" i="0">
+              <a:rPr sz="1450" b="0" i="0">
                 <a:solidFill>
                   <a:srgbClr val="F7F6EF"/>
                 </a:solidFill>
                 <a:latin typeface="Arial"/>
               </a:rPr>
-              <a:t>, not </a:t>
-            </a:r>
-            <a:r>
-              <a:rPr sz="1550" b="0" i="0">
+              <a:t>, versus </a:t>
+            </a:r>
+            <a:r>
+              <a:rPr sz="1450" b="0" i="0">
                 <a:solidFill>
                   <a:srgbClr val="FFC83D"/>
                 </a:solidFill>
                 <a:latin typeface="Arial"/>
               </a:rPr>
-              <a:t>$1.6M</a:t>
-            </a:r>
-            <a:r>
-              <a:rPr sz="1550" b="0" i="0">
+              <a:t>$1,630,517</a:t>
+            </a:r>
+            <a:r>
+              <a:rPr sz="1450" b="0" i="0">
                 <a:solidFill>
                   <a:srgbClr val="F7F6EF"/>
                 </a:solidFill>
                 <a:latin typeface="Arial"/>
               </a:rPr>
-              <a:t>. Today: zero users, zero revenue.</a:t>
-            </a:r>
-          </a:p>
-          <a:p>
-            <a:pPr marL="264121" indent="-264121">
+              <a:t> </a:t>
+            </a:r>
+            <a:r>
+              <a:rPr sz="1450" b="1" i="0">
+                <a:solidFill>
+                  <a:srgbClr val="4EE1FF"/>
+                </a:solidFill>
+                <a:latin typeface="Arial"/>
+              </a:rPr>
+              <a:t>(P)</a:t>
+            </a:r>
+            <a:r>
+              <a:rPr sz="1450" b="0" i="0">
+                <a:solidFill>
+                  <a:srgbClr val="F7F6EF"/>
+                </a:solidFill>
+                <a:latin typeface="Arial"/>
+              </a:rPr>
+              <a:t> from install economics.</a:t>
+            </a:r>
+          </a:p>
+          <a:p>
+            <a:pPr marL="247088" indent="-247088">
               <a:lnSpc>
                 <a:spcPct val="116000"/>
               </a:lnSpc>
               <a:spcBef>
-                <a:spcPts val="852"/>
+                <a:spcPts val="797"/>
               </a:spcBef>
               <a:buClr>
                 <a:srgbClr val="D4FF3A"/>
@@ -30954,22 +31144,145 @@
               <a:buChar char="—"/>
             </a:pPr>
             <a:r>
-              <a:rPr sz="1550" b="0" i="0">
+              <a:rPr sz="1450" b="0" i="0">
+                <a:solidFill>
+                  <a:srgbClr val="F7F6EF"/>
+                </a:solidFill>
+                <a:latin typeface="Arial"/>
+              </a:rPr>
+              <a:t>Diverging 3.88x, Year-3 revenue is a band — </a:t>
+            </a:r>
+            <a:r>
+              <a:rPr sz="1450" b="0" i="0">
                 <a:solidFill>
                   <a:srgbClr val="FFC83D"/>
                 </a:solidFill>
                 <a:latin typeface="Arial"/>
               </a:rPr>
+              <a:t>$0.4M</a:t>
+            </a:r>
+            <a:r>
+              <a:rPr sz="1450" b="0" i="0">
+                <a:solidFill>
+                  <a:srgbClr val="F7F6EF"/>
+                </a:solidFill>
+                <a:latin typeface="Arial"/>
+              </a:rPr>
+              <a:t>-</a:t>
+            </a:r>
+            <a:r>
+              <a:rPr sz="1450" b="0" i="0">
+                <a:solidFill>
+                  <a:srgbClr val="FFC83D"/>
+                </a:solidFill>
+                <a:latin typeface="Arial"/>
+              </a:rPr>
+              <a:t>$1.6M</a:t>
+            </a:r>
+            <a:r>
+              <a:rPr sz="1450" b="0" i="0">
+                <a:solidFill>
+                  <a:srgbClr val="F7F6EF"/>
+                </a:solidFill>
+                <a:latin typeface="Arial"/>
+              </a:rPr>
+              <a:t> </a:t>
+            </a:r>
+            <a:r>
+              <a:rPr sz="1450" b="1" i="0">
+                <a:solidFill>
+                  <a:srgbClr val="4EE1FF"/>
+                </a:solidFill>
+                <a:latin typeface="Arial"/>
+              </a:rPr>
+              <a:t>(P)</a:t>
+            </a:r>
+            <a:r>
+              <a:rPr sz="1450" b="0" i="0">
+                <a:solidFill>
+                  <a:srgbClr val="F7F6EF"/>
+                </a:solidFill>
+                <a:latin typeface="Arial"/>
+              </a:rPr>
+              <a:t>, not </a:t>
+            </a:r>
+            <a:r>
+              <a:rPr sz="1450" b="0" i="0">
+                <a:solidFill>
+                  <a:srgbClr val="FFC83D"/>
+                </a:solidFill>
+                <a:latin typeface="Arial"/>
+              </a:rPr>
+              <a:t>$1.6M</a:t>
+            </a:r>
+            <a:r>
+              <a:rPr sz="1450" b="0" i="0">
+                <a:solidFill>
+                  <a:srgbClr val="F7F6EF"/>
+                </a:solidFill>
+                <a:latin typeface="Arial"/>
+              </a:rPr>
+              <a:t>. Today: zero users, zero revenue.</a:t>
+            </a:r>
+          </a:p>
+          <a:p>
+            <a:pPr marL="247088" indent="-247088">
+              <a:lnSpc>
+                <a:spcPct val="116000"/>
+              </a:lnSpc>
+              <a:spcBef>
+                <a:spcPts val="797"/>
+              </a:spcBef>
+              <a:buClr>
+                <a:srgbClr val="D4FF3A"/>
+              </a:buClr>
+              <a:buFont typeface="Arial"/>
+              <a:buChar char="—"/>
+            </a:pPr>
+            <a:r>
+              <a:rPr sz="1450" b="0" i="0">
+                <a:solidFill>
+                  <a:srgbClr val="F7F6EF"/>
+                </a:solidFill>
+                <a:latin typeface="Arial"/>
+              </a:rPr>
+              <a:t>Trivia IAP, US iOS top three: ~</a:t>
+            </a:r>
+            <a:r>
+              <a:rPr sz="1450" b="0" i="0">
+                <a:solidFill>
+                  <a:srgbClr val="FFC83D"/>
+                </a:solidFill>
+                <a:latin typeface="Arial"/>
+              </a:rPr>
+              <a:t>$102.5K</a:t>
+            </a:r>
+            <a:r>
+              <a:rPr sz="1450" b="0" i="0">
+                <a:solidFill>
+                  <a:srgbClr val="F7F6EF"/>
+                </a:solidFill>
+                <a:latin typeface="Arial"/>
+              </a:rPr>
+              <a:t>/week peak (Sensor Tower est., before Apple's 15-30% cut). </a:t>
+            </a:r>
+            <a:r>
+              <a:rPr sz="1450" b="0" i="0">
+                <a:solidFill>
+                  <a:srgbClr val="FFC83D"/>
+                </a:solidFill>
+                <a:latin typeface="Arial"/>
+              </a:rPr>
               <a:t>$43.99</a:t>
             </a:r>
             <a:r>
-              <a:rPr sz="1550" b="0" i="0">
+              <a:rPr sz="1450" b="0" i="0">
                 <a:solidFill>
                   <a:srgbClr val="F7F6EF"/>
                 </a:solidFill>
                 <a:latin typeface="Arial"/>
               </a:rPr>
-              <a:t>/yr: Sporcle Orange individual. 9.03%: our arithmetic on Duolingo's filed counts, not a filed ratio. Year-3 installs, 20% monthly churn: unsourced.</a:t>
+              <a:t>/yr: Sporcle Orange.</a:t>
             </a:r>
           </a:p>
         </p:txBody>

--- a/public/product/investor/factduel-seed-deck.pptx
+++ b/public/product/investor/factduel-seed-deck.pptx
@@ -859,6 +859,12 @@
           <a:lstStyle/>
           <a:p>
             <a:r>
+              <a:t>The plan marker and the conditional mood on this line are load-bearing. Every other bullet on this slide is a fact that is true today, so an unmarked present-tense "Route A stakes real money" reads, to anyone landing here out of order, as a description of a shipped real-money wagering product. There is no payment surface anywhere in the tree and no accounts of any kind.</a:t>
+            </a:r>
+          </a:p>
+          <a:p/>
+          <a:p>
+            <a:r>
               <a:t>Eight risks now, not seven. Route A on the business-model slide takes real money on the outcome of a knowledge question, and in many jurisdictions that is regulated as skill gaming or gambling rather than as a game sale. We have no answer and we say so rather than discovering it in diligence.</a:t>
             </a:r>
           </a:p>
@@ -4366,7 +4372,7 @@
           <a:p/>
           <a:p>
             <a:r>
-              <a:t>Volunteer the gap before you are asked, because a reader can check every word of it in the public repository in about two minutes. Today: there is no payment surface anywhere in the tree; the duel coins say on screen "Free simulated coins. No monetary value."; expedition stake tiers stake RUN-SCORE POINTS and never a currency (+2/0, +3/-1, +4/-3, lib/expeditions.mjs), under a design rule that nothing stakes a currency and nothing is minted by losing; expeditions are replayable by design and there are no accounts, so "one entry per player" is not yet expressible; and a route’s six cards are frozen — a replay reshuffles the OPTIONS, not the questions, out of a 54-question bank.</a:t>
+              <a:t>Volunteer the gap before you are asked, because a reader can check every word of it in the public repository in about two minutes. Today: there is no payment surface anywhere in the tree; the duel coins say on screen "Free simulated coins. No monetary value."; expedition stake tiers stake RUN-SCORE POINTS and never a currency (+2/0, +3/-1, +4/-3, lib/expeditions.mjs), under the expedition betting rule that the bet itself stakes no currency — and note the scope of that rule carefully, because a duel DOES stake coins: 0/10/25/50/100 simulated coins per room, reserved into a stake x 2 escrow (lib/server/room-engine.mjs:37, 181-185), which is the nearest shipped mechanism to the coin half of the ask. It is per-room, never persisted to a wallet, and labelled on screen as having no monetary value; expeditions are replayable by design and there are no accounts, so "one entry per player" is not yet expressible; and a route’s six cards are frozen — a replay reshuffles the OPTIONS, not the questions, out of a 54-question bank.</a:t>
             </a:r>
           </a:p>
           <a:p/>
@@ -9796,7 +9802,25 @@
                 </a:solidFill>
                 <a:latin typeface="Arial"/>
               </a:rPr>
-              <a:t>Wagering law. Route A stakes real money on a knowledge outcome — regulated as skill gaming or gambling in many jurisdictions. Unanswered.</a:t>
+              <a:t>Wagering law. Route A </a:t>
+            </a:r>
+            <a:r>
+              <a:rPr sz="1500" b="1" i="0">
+                <a:solidFill>
+                  <a:srgbClr val="4EE1FF"/>
+                </a:solidFill>
+                <a:latin typeface="Arial"/>
+              </a:rPr>
+              <a:t>(P)</a:t>
+            </a:r>
+            <a:r>
+              <a:rPr sz="1500" b="0" i="0">
+                <a:solidFill>
+                  <a:srgbClr val="F7F6EF"/>
+                </a:solidFill>
+                <a:latin typeface="Arial"/>
+              </a:rPr>
+              <a:t> would stake real money on a knowledge outcome: skill gaming or gambling in many jurisdictions. Nothing takes money today.</a:t>
             </a:r>
           </a:p>
         </p:txBody>
@@ -30893,7 +30917,7 @@
           </a:bodyPr>
           <a:lstStyle/>
           <a:p>
-            <a:pPr marL="247088" indent="-247088">
+            <a:pPr marL="238571" indent="-238571">
               <a:lnSpc>
                 <a:spcPct val="116000"/>
               </a:lnSpc>
@@ -30904,7 +30928,7 @@
               <a:buChar char="—"/>
             </a:pPr>
             <a:r>
-              <a:rPr sz="1450" b="0" i="0">
+              <a:rPr sz="1400" b="0" i="0">
                 <a:solidFill>
                   <a:srgbClr val="F7F6EF"/>
                 </a:solidFill>
@@ -30913,7 +30937,7 @@
               <a:t>Route A </a:t>
             </a:r>
             <a:r>
-              <a:rPr sz="1450" b="1" i="0">
+              <a:rPr sz="1400" b="1" i="0">
                 <a:solidFill>
                   <a:srgbClr val="4EE1FF"/>
                 </a:solidFill>
@@ -30922,7 +30946,7 @@
               <a:t>(P)</a:t>
             </a:r>
             <a:r>
-              <a:rPr sz="1450" b="0" i="0">
+              <a:rPr sz="1400" b="0" i="0">
                 <a:solidFill>
                   <a:srgbClr val="F7F6EF"/>
                 </a:solidFill>
@@ -30932,12 +30956,12 @@
             </a:r>
           </a:p>
           <a:p>
-            <a:pPr marL="247088" indent="-247088">
+            <a:pPr marL="238571" indent="-238571">
               <a:lnSpc>
                 <a:spcPct val="116000"/>
               </a:lnSpc>
               <a:spcBef>
-                <a:spcPts val="797"/>
+                <a:spcPts val="770"/>
               </a:spcBef>
               <a:buClr>
                 <a:srgbClr val="D4FF3A"/>
@@ -30946,22 +30970,22 @@
               <a:buChar char="—"/>
             </a:pPr>
             <a:r>
-              <a:rPr sz="1450" b="0" i="0">
+              <a:rPr sz="1400" b="0" i="0">
                 <a:solidFill>
                   <a:srgbClr val="F7F6EF"/>
                 </a:solidFill>
                 <a:latin typeface="Arial"/>
               </a:rPr>
-              <a:t>Nothing of Route A exists. No payment surface, no accounts, and expeditions today are free and replayable.</a:t>
-            </a:r>
-          </a:p>
-          <a:p>
-            <a:pPr marL="247088" indent="-247088">
+              <a:t>Nothing of Route A exists: no payment surface, no accounts, expeditions free and replayable. Duels stake simulated coins only.</a:t>
+            </a:r>
+          </a:p>
+          <a:p>
+            <a:pPr marL="238571" indent="-238571">
               <a:lnSpc>
                 <a:spcPct val="116000"/>
               </a:lnSpc>
               <a:spcBef>
-                <a:spcPts val="797"/>
+                <a:spcPts val="770"/>
               </a:spcBef>
               <a:buClr>
                 <a:srgbClr val="D4FF3A"/>
@@ -30970,7 +30994,7 @@
               <a:buChar char="—"/>
             </a:pPr>
             <a:r>
-              <a:rPr sz="1450" b="0" i="0">
+              <a:rPr sz="1400" b="0" i="0">
                 <a:solidFill>
                   <a:srgbClr val="F7F6EF"/>
                 </a:solidFill>
@@ -30979,7 +31003,7 @@
               <a:t>Route B </a:t>
             </a:r>
             <a:r>
-              <a:rPr sz="1450" b="1" i="0">
+              <a:rPr sz="1400" b="1" i="0">
                 <a:solidFill>
                   <a:srgbClr val="4EE1FF"/>
                 </a:solidFill>
@@ -30988,7 +31012,7 @@
               <a:t>(P)</a:t>
             </a:r>
             <a:r>
-              <a:rPr sz="1450" b="0" i="0">
+              <a:rPr sz="1400" b="0" i="0">
                 <a:solidFill>
                   <a:srgbClr val="F7F6EF"/>
                 </a:solidFill>
@@ -30997,7 +31021,7 @@
               <a:t> — habit subscription. Duolingo: </a:t>
             </a:r>
             <a:r>
-              <a:rPr sz="1450" b="0" i="0">
+              <a:rPr sz="1400" b="0" i="0">
                 <a:solidFill>
                   <a:srgbClr val="FFC83D"/>
                 </a:solidFill>
@@ -31006,7 +31030,7 @@
               <a:t>$1,037.6M</a:t>
             </a:r>
             <a:r>
-              <a:rPr sz="1450" b="0" i="0">
+              <a:rPr sz="1400" b="0" i="0">
                 <a:solidFill>
                   <a:srgbClr val="F7F6EF"/>
                 </a:solidFill>
@@ -31016,12 +31040,12 @@
             </a:r>
           </a:p>
           <a:p>
-            <a:pPr marL="247088" indent="-247088">
+            <a:pPr marL="238571" indent="-238571">
               <a:lnSpc>
                 <a:spcPct val="116000"/>
               </a:lnSpc>
               <a:spcBef>
-                <a:spcPts val="797"/>
+                <a:spcPts val="770"/>
               </a:spcBef>
               <a:buClr>
                 <a:srgbClr val="D4FF3A"/>
@@ -31030,7 +31054,7 @@
               <a:buChar char="—"/>
             </a:pPr>
             <a:r>
-              <a:rPr sz="1450" b="0" i="0">
+              <a:rPr sz="1400" b="0" i="0">
                 <a:solidFill>
                   <a:srgbClr val="F7F6EF"/>
                 </a:solidFill>
@@ -31039,7 +31063,7 @@
               <a:t>Cross-check at base-case Year-3 scale: 105,900 MAU x 9.03% x </a:t>
             </a:r>
             <a:r>
-              <a:rPr sz="1450" b="0" i="0">
+              <a:rPr sz="1400" b="0" i="0">
                 <a:solidFill>
                   <a:srgbClr val="FFC83D"/>
                 </a:solidFill>
@@ -31048,7 +31072,7 @@
               <a:t>$43.99</a:t>
             </a:r>
             <a:r>
-              <a:rPr sz="1450" b="0" i="0">
+              <a:rPr sz="1400" b="0" i="0">
                 <a:solidFill>
                   <a:srgbClr val="F7F6EF"/>
                 </a:solidFill>
@@ -31057,7 +31081,7 @@
               <a:t>/yr = </a:t>
             </a:r>
             <a:r>
-              <a:rPr sz="1450" b="0" i="0">
+              <a:rPr sz="1400" b="0" i="0">
                 <a:solidFill>
                   <a:srgbClr val="FFC83D"/>
                 </a:solidFill>
@@ -31066,7 +31090,7 @@
               <a:t>$420,666</a:t>
             </a:r>
             <a:r>
-              <a:rPr sz="1450" b="0" i="0">
+              <a:rPr sz="1400" b="0" i="0">
                 <a:solidFill>
                   <a:srgbClr val="F7F6EF"/>
                 </a:solidFill>
@@ -31075,7 +31099,7 @@
               <a:t> </a:t>
             </a:r>
             <a:r>
-              <a:rPr sz="1450" b="1" i="0">
+              <a:rPr sz="1400" b="1" i="0">
                 <a:solidFill>
                   <a:srgbClr val="4EE1FF"/>
                 </a:solidFill>
@@ -31084,7 +31108,7 @@
               <a:t>(P)</a:t>
             </a:r>
             <a:r>
-              <a:rPr sz="1450" b="0" i="0">
+              <a:rPr sz="1400" b="0" i="0">
                 <a:solidFill>
                   <a:srgbClr val="F7F6EF"/>
                 </a:solidFill>
@@ -31093,7 +31117,7 @@
               <a:t>, versus </a:t>
             </a:r>
             <a:r>
-              <a:rPr sz="1450" b="0" i="0">
+              <a:rPr sz="1400" b="0" i="0">
                 <a:solidFill>
                   <a:srgbClr val="FFC83D"/>
                 </a:solidFill>
@@ -31102,7 +31126,7 @@
               <a:t>$1,630,517</a:t>
             </a:r>
             <a:r>
-              <a:rPr sz="1450" b="0" i="0">
+              <a:rPr sz="1400" b="0" i="0">
                 <a:solidFill>
                   <a:srgbClr val="F7F6EF"/>
                 </a:solidFill>
@@ -31111,7 +31135,7 @@
               <a:t> </a:t>
             </a:r>
             <a:r>
-              <a:rPr sz="1450" b="1" i="0">
+              <a:rPr sz="1400" b="1" i="0">
                 <a:solidFill>
                   <a:srgbClr val="4EE1FF"/>
                 </a:solidFill>
@@ -31120,7 +31144,7 @@
               <a:t>(P)</a:t>
             </a:r>
             <a:r>
-              <a:rPr sz="1450" b="0" i="0">
+              <a:rPr sz="1400" b="0" i="0">
                 <a:solidFill>
                   <a:srgbClr val="F7F6EF"/>
                 </a:solidFill>
@@ -31130,12 +31154,12 @@
             </a:r>
           </a:p>
           <a:p>
-            <a:pPr marL="247088" indent="-247088">
+            <a:pPr marL="238571" indent="-238571">
               <a:lnSpc>
                 <a:spcPct val="116000"/>
               </a:lnSpc>
               <a:spcBef>
-                <a:spcPts val="797"/>
+                <a:spcPts val="770"/>
               </a:spcBef>
               <a:buClr>
                 <a:srgbClr val="D4FF3A"/>
@@ -31144,7 +31168,7 @@
               <a:buChar char="—"/>
             </a:pPr>
             <a:r>
-              <a:rPr sz="1450" b="0" i="0">
+              <a:rPr sz="1400" b="0" i="0">
                 <a:solidFill>
                   <a:srgbClr val="F7F6EF"/>
                 </a:solidFill>
@@ -31153,7 +31177,7 @@
               <a:t>Diverging 3.88x, Year-3 revenue is a band — </a:t>
             </a:r>
             <a:r>
-              <a:rPr sz="1450" b="0" i="0">
+              <a:rPr sz="1400" b="0" i="0">
                 <a:solidFill>
                   <a:srgbClr val="FFC83D"/>
                 </a:solidFill>
@@ -31162,7 +31186,7 @@
               <a:t>$0.4M</a:t>
             </a:r>
             <a:r>
-              <a:rPr sz="1450" b="0" i="0">
+              <a:rPr sz="1400" b="0" i="0">
                 <a:solidFill>
                   <a:srgbClr val="F7F6EF"/>
                 </a:solidFill>
@@ -31171,7 +31195,7 @@
               <a:t>-</a:t>
             </a:r>
             <a:r>
-              <a:rPr sz="1450" b="0" i="0">
+              <a:rPr sz="1400" b="0" i="0">
                 <a:solidFill>
                   <a:srgbClr val="FFC83D"/>
                 </a:solidFill>
@@ -31180,7 +31204,7 @@
               <a:t>$1.6M</a:t>
             </a:r>
             <a:r>
-              <a:rPr sz="1450" b="0" i="0">
+              <a:rPr sz="1400" b="0" i="0">
                 <a:solidFill>
                   <a:srgbClr val="F7F6EF"/>
                 </a:solidFill>
@@ -31189,7 +31213,7 @@
               <a:t> </a:t>
             </a:r>
             <a:r>
-              <a:rPr sz="1450" b="1" i="0">
+              <a:rPr sz="1400" b="1" i="0">
                 <a:solidFill>
                   <a:srgbClr val="4EE1FF"/>
                 </a:solidFill>
@@ -31198,7 +31222,7 @@
               <a:t>(P)</a:t>
             </a:r>
             <a:r>
-              <a:rPr sz="1450" b="0" i="0">
+              <a:rPr sz="1400" b="0" i="0">
                 <a:solidFill>
                   <a:srgbClr val="F7F6EF"/>
                 </a:solidFill>
@@ -31207,7 +31231,7 @@
               <a:t>, not </a:t>
             </a:r>
             <a:r>
-              <a:rPr sz="1450" b="0" i="0">
+              <a:rPr sz="1400" b="0" i="0">
                 <a:solidFill>
                   <a:srgbClr val="FFC83D"/>
                 </a:solidFill>
@@ -31216,7 +31240,7 @@
               <a:t>$1.6M</a:t>
             </a:r>
             <a:r>
-              <a:rPr sz="1450" b="0" i="0">
+              <a:rPr sz="1400" b="0" i="0">
                 <a:solidFill>
                   <a:srgbClr val="F7F6EF"/>
                 </a:solidFill>
@@ -31226,12 +31250,12 @@
             </a:r>
           </a:p>
           <a:p>
-            <a:pPr marL="247088" indent="-247088">
+            <a:pPr marL="238571" indent="-238571">
               <a:lnSpc>
                 <a:spcPct val="116000"/>
               </a:lnSpc>
               <a:spcBef>
-                <a:spcPts val="797"/>
+                <a:spcPts val="770"/>
               </a:spcBef>
               <a:buClr>
                 <a:srgbClr val="D4FF3A"/>
@@ -31240,7 +31264,7 @@
               <a:buChar char="—"/>
             </a:pPr>
             <a:r>
-              <a:rPr sz="1450" b="0" i="0">
+              <a:rPr sz="1400" b="0" i="0">
                 <a:solidFill>
                   <a:srgbClr val="F7F6EF"/>
                 </a:solidFill>
@@ -31249,7 +31273,7 @@
               <a:t>Trivia IAP, US iOS top three: ~</a:t>
             </a:r>
             <a:r>
-              <a:rPr sz="1450" b="0" i="0">
+              <a:rPr sz="1400" b="0" i="0">
                 <a:solidFill>
                   <a:srgbClr val="FFC83D"/>
                 </a:solidFill>
@@ -31258,7 +31282,7 @@
               <a:t>$102.5K</a:t>
             </a:r>
             <a:r>
-              <a:rPr sz="1450" b="0" i="0">
+              <a:rPr sz="1400" b="0" i="0">
                 <a:solidFill>
                   <a:srgbClr val="F7F6EF"/>
                 </a:solidFill>
@@ -31267,7 +31291,7 @@
               <a:t>/week peak (Sensor Tower est., before Apple's 15-30% cut). </a:t>
             </a:r>
             <a:r>
-              <a:rPr sz="1450" b="0" i="0">
+              <a:rPr sz="1400" b="0" i="0">
                 <a:solidFill>
                   <a:srgbClr val="FFC83D"/>
                 </a:solidFill>
@@ -31276,7 +31300,7 @@
               <a:t>$43.99</a:t>
             </a:r>
             <a:r>
-              <a:rPr sz="1450" b="0" i="0">
+              <a:rPr sz="1400" b="0" i="0">
                 <a:solidFill>
                   <a:srgbClr val="F7F6EF"/>
                 </a:solidFill>

--- a/public/product/investor/factduel-seed-deck.pptx
+++ b/public/product/investor/factduel-seed-deck.pptx
@@ -2021,7 +2021,7 @@
           <a:p/>
           <a:p>
             <a:r>
-              <a:t>The full shipped inventory in the static build (§7.2): bot duels in all three modes, expeditions, discovery, the vault, the passport, the events calendar and the limited modes.</a:t>
+              <a:t>The full shipped inventory in the static build (§7.2): bot duels in all three modes, expeditions, discovery, the vault, the passport with the Supporter Card and boards, the events calendar with fixture sets and the limited modes, the coin wallet with the priced ad card, and the Rules of the coin and Trust pages. Behind it, not reachable from the static build: the ledger persisted to D1 with every guard a constraint violation (tests/ledger-store.test.mjs runs one suite against the memory store and the D1 harness), a guest wallet route that issues a nonce per ad and posts each reward as a ledger grant, and an hourly reconcile that replays the books and goes red on drift.</a:t>
             </a:r>
           </a:p>
           <a:p/>
@@ -2033,7 +2033,7 @@
           <a:p/>
           <a:p>
             <a:r>
-              <a:t>Be exact about what it is and is not: no accounts and no server-side progression, the bank is 54 sample questions, two-device friend duels are disabled in that build with an on-screen notice, it produces no retention data on its own, and nobody who opens it is a user in any sense this deck would count. There is no live feed, no scores service and no rights deal with any league, broadcaster or rights holder.</a:t>
+              <a:t>Be exact about what it is and is not: no accounts and no server-side progression, the served bank is 329 sports questions, two-device friend duels are disabled in that build with an on-screen notice, it produces no retention data on its own, and nobody who opens it is a user in any sense this deck would count. There is no live feed, no scores service and no rights deal with any league, broadcaster or rights holder.</a:t>
             </a:r>
           </a:p>
           <a:p/>
@@ -15189,7 +15189,7 @@
           </a:bodyPr>
           <a:lstStyle/>
           <a:p>
-            <a:pPr marL="255604" indent="-255604">
+            <a:pPr marL="238571" indent="-238571">
               <a:lnSpc>
                 <a:spcPct val="116000"/>
               </a:lnSpc>
@@ -15200,22 +15200,22 @@
               <a:buChar char="—"/>
             </a:pPr>
             <a:r>
-              <a:rPr sz="1500" b="0" i="0">
+              <a:rPr sz="1400" b="0" i="0">
                 <a:solidFill>
                   <a:srgbClr val="F7F6EF"/>
                 </a:solidFill>
                 <a:latin typeface="Arial"/>
               </a:rPr>
-              <a:t>Player record, badges, stamps and the Locker: the long-tail progression surface, all device-local. None of it is a ranked or verified record, none is sent to a server, and reset clears it.</a:t>
-            </a:r>
-          </a:p>
-          <a:p>
-            <a:pPr marL="255604" indent="-255604">
+              <a:t>Player record, Supporter Card (allegiance per sport, per-sport rating and tier, seasons on the PL/NBA/F1/MLB/CWC calendars, matchweek streaks with free shields), badges, stamps and the Locker: the long-tail progression surface, all device-local. None of it is a ranked or verified record, none is sent to a server, and reset clears it.</a:t>
+            </a:r>
+          </a:p>
+          <a:p>
+            <a:pPr marL="238571" indent="-238571">
               <a:lnSpc>
                 <a:spcPct val="116000"/>
               </a:lnSpc>
               <a:spcBef>
-                <a:spcPts val="825"/>
+                <a:spcPts val="770"/>
               </a:spcBef>
               <a:buClr>
                 <a:srgbClr val="4EE1FF"/>
@@ -15224,22 +15224,22 @@
               <a:buChar char="—"/>
             </a:pPr>
             <a:r>
-              <a:rPr sz="1500" b="0" i="0">
+              <a:rPr sz="1400" b="0" i="0">
                 <a:solidFill>
                   <a:srgbClr val="F7F6EF"/>
                 </a:solidFill>
                 <a:latin typeface="Arial"/>
               </a:rPr>
-              <a:t>Every effect is generated at runtime — procedural audio with no audio files, 3D loaded lazily. Everything works without WebGL; reduced-motion settings override the effects layer toward less motion.</a:t>
-            </a:r>
-          </a:p>
-          <a:p>
-            <a:pPr marL="255604" indent="-255604">
+              <a:t>One currency. Gems were retired on 17 Sep 2026; cosmetics unlock by level and achievement. Rivals and a 'this week vs last week' board are built from real duels on the device; leagues of 30 open with accounts and are shown as exactly that, with no placeholder table.</a:t>
+            </a:r>
+          </a:p>
+          <a:p>
+            <a:pPr marL="238571" indent="-238571">
               <a:lnSpc>
                 <a:spcPct val="116000"/>
               </a:lnSpc>
               <a:spcBef>
-                <a:spcPts val="825"/>
+                <a:spcPts val="770"/>
               </a:spcBef>
               <a:buClr>
                 <a:srgbClr val="4EE1FF"/>
@@ -15248,7 +15248,31 @@
               <a:buChar char="—"/>
             </a:pPr>
             <a:r>
-              <a:rPr sz="1500" b="0" i="0">
+              <a:rPr sz="1400" b="0" i="0">
+                <a:solidFill>
+                  <a:srgbClr val="F7F6EF"/>
+                </a:solidFill>
+                <a:latin typeface="Arial"/>
+              </a:rPr>
+              <a:t>Every effect is generated at runtime — procedural audio with no audio files, 3D loaded lazily. Everything works without WebGL; reduced-motion settings override the effects layer toward less motion.</a:t>
+            </a:r>
+          </a:p>
+          <a:p>
+            <a:pPr marL="238571" indent="-238571">
+              <a:lnSpc>
+                <a:spcPct val="116000"/>
+              </a:lnSpc>
+              <a:spcBef>
+                <a:spcPts val="770"/>
+              </a:spcBef>
+              <a:buClr>
+                <a:srgbClr val="4EE1FF"/>
+              </a:buClr>
+              <a:buFont typeface="Arial"/>
+              <a:buChar char="—"/>
+            </a:pPr>
+            <a:r>
+              <a:rPr sz="1400" b="0" i="0">
                 <a:solidFill>
                   <a:srgbClr val="F7F6EF"/>
                 </a:solidFill>
@@ -29817,7 +29841,7 @@
           </a:bodyPr>
           <a:lstStyle/>
           <a:p>
-            <a:pPr marL="247088" indent="-247088">
+            <a:pPr marL="204478" indent="-204478">
               <a:lnSpc>
                 <a:spcPct val="116000"/>
               </a:lnSpc>
@@ -29828,7 +29852,7 @@
               <a:buChar char="—"/>
             </a:pPr>
             <a:r>
-              <a:rPr sz="1400" b="0" i="0">
+              <a:rPr sz="1200" b="0" i="0">
                 <a:solidFill>
                   <a:srgbClr val="F7F6EF"/>
                 </a:solidFill>
@@ -29838,12 +29862,12 @@
             </a:r>
           </a:p>
           <a:p>
-            <a:pPr marL="247088" indent="-247088">
+            <a:pPr marL="204478" indent="-204478">
               <a:lnSpc>
                 <a:spcPct val="116000"/>
               </a:lnSpc>
               <a:spcBef>
-                <a:spcPts val="770"/>
+                <a:spcPts val="660"/>
               </a:spcBef>
               <a:buClr>
                 <a:srgbClr val="D4FF3A"/>
@@ -29852,7 +29876,7 @@
               <a:buChar char="—"/>
             </a:pPr>
             <a:r>
-              <a:rPr sz="1400" b="0" i="0">
+              <a:rPr sz="1200" b="0" i="0">
                 <a:solidFill>
                   <a:srgbClr val="F7F6EF"/>
                 </a:solidFill>
@@ -29862,12 +29886,12 @@
             </a:r>
           </a:p>
           <a:p>
-            <a:pPr marL="247088" indent="-247088">
+            <a:pPr marL="204478" indent="-204478">
               <a:lnSpc>
                 <a:spcPct val="116000"/>
               </a:lnSpc>
               <a:spcBef>
-                <a:spcPts val="770"/>
+                <a:spcPts val="660"/>
               </a:spcBef>
               <a:buClr>
                 <a:srgbClr val="D4FF3A"/>
@@ -29876,7 +29900,7 @@
               <a:buChar char="—"/>
             </a:pPr>
             <a:r>
-              <a:rPr sz="1400" b="0" i="0">
+              <a:rPr sz="1200" b="0" i="0">
                 <a:solidFill>
                   <a:srgbClr val="F7F6EF"/>
                 </a:solidFill>
@@ -29886,12 +29910,12 @@
             </a:r>
           </a:p>
           <a:p>
-            <a:pPr marL="247088" indent="-247088">
+            <a:pPr marL="204478" indent="-204478">
               <a:lnSpc>
                 <a:spcPct val="116000"/>
               </a:lnSpc>
               <a:spcBef>
-                <a:spcPts val="770"/>
+                <a:spcPts val="660"/>
               </a:spcBef>
               <a:buClr>
                 <a:srgbClr val="D4FF3A"/>
@@ -29900,22 +29924,22 @@
               <a:buChar char="—"/>
             </a:pPr>
             <a:r>
-              <a:rPr sz="1400" b="0" i="0">
+              <a:rPr sz="1200" b="0" i="0">
                 <a:solidFill>
                   <a:srgbClr val="F7F6EF"/>
                 </a:solidFill>
                 <a:latin typeface="Arial"/>
               </a:rPr>
-              <a:t>Two-device friend duels need a server and are disabled in that build, with an on-screen notice. The calendar is hand-checked and static: no live feed, no scores API.</a:t>
-            </a:r>
-          </a:p>
-          <a:p>
-            <a:pPr marL="247088" indent="-247088">
+              <a:t>Since 17 Sep: a per-sport rating with seasons on the real calendars, a Supporter Card, fixture sets around each calendar beat, and a 'Rules of the coin' page whose every number is read from the economy config — all device-local, none a verified record.</a:t>
+            </a:r>
+          </a:p>
+          <a:p>
+            <a:pPr marL="204478" indent="-204478">
               <a:lnSpc>
                 <a:spcPct val="116000"/>
               </a:lnSpc>
               <a:spcBef>
-                <a:spcPts val="770"/>
+                <a:spcPts val="660"/>
               </a:spcBef>
               <a:buClr>
                 <a:srgbClr val="D4FF3A"/>
@@ -29924,7 +29948,31 @@
               <a:buChar char="—"/>
             </a:pPr>
             <a:r>
-              <a:rPr sz="1400" b="0" i="0">
+              <a:rPr sz="1200" b="0" i="0">
+                <a:solidFill>
+                  <a:srgbClr val="F7F6EF"/>
+                </a:solidFill>
+                <a:latin typeface="Arial"/>
+              </a:rPr>
+              <a:t>Two-device friend duels need a server and are disabled in that build, with an on-screen notice. The calendar is hand-checked and static: no live feed, no scores API.</a:t>
+            </a:r>
+          </a:p>
+          <a:p>
+            <a:pPr marL="204478" indent="-204478">
+              <a:lnSpc>
+                <a:spcPct val="116000"/>
+              </a:lnSpc>
+              <a:spcBef>
+                <a:spcPts val="660"/>
+              </a:spcBef>
+              <a:buClr>
+                <a:srgbClr val="D4FF3A"/>
+              </a:buClr>
+              <a:buFont typeface="Arial"/>
+              <a:buChar char="—"/>
+            </a:pPr>
+            <a:r>
+              <a:rPr sz="1200" b="0" i="0">
                 <a:solidFill>
                   <a:srgbClr val="F7F6EF"/>
                 </a:solidFill>
@@ -31619,7 +31667,7 @@
           </a:bodyPr>
           <a:lstStyle/>
           <a:p>
-            <a:pPr marL="264121" indent="-264121">
+            <a:pPr marL="247088" indent="-247088">
               <a:lnSpc>
                 <a:spcPct val="116000"/>
               </a:lnSpc>
@@ -31630,7 +31678,7 @@
               <a:buChar char="—"/>
             </a:pPr>
             <a:r>
-              <a:rPr sz="1550" b="0" i="0">
+              <a:rPr sz="1450" b="0" i="0">
                 <a:solidFill>
                   <a:srgbClr val="F7F6EF"/>
                 </a:solidFill>
@@ -31639,7 +31687,7 @@
               <a:t>Rewarded video eCPM, in-app, 2024-26 (likely): US </a:t>
             </a:r>
             <a:r>
-              <a:rPr sz="1550" b="0" i="0">
+              <a:rPr sz="1450" b="0" i="0">
                 <a:solidFill>
                   <a:srgbClr val="FFC83D"/>
                 </a:solidFill>
@@ -31648,7 +31696,7 @@
               <a:t>$15</a:t>
             </a:r>
             <a:r>
-              <a:rPr sz="1550" b="0" i="0">
+              <a:rPr sz="1450" b="0" i="0">
                 <a:solidFill>
                   <a:srgbClr val="F7F6EF"/>
                 </a:solidFill>
@@ -31657,7 +31705,7 @@
               <a:t>-30; UK </a:t>
             </a:r>
             <a:r>
-              <a:rPr sz="1550" b="0" i="0">
+              <a:rPr sz="1450" b="0" i="0">
                 <a:solidFill>
                   <a:srgbClr val="FFC83D"/>
                 </a:solidFill>
@@ -31666,7 +31714,7 @@
               <a:t>$17</a:t>
             </a:r>
             <a:r>
-              <a:rPr sz="1550" b="0" i="0">
+              <a:rPr sz="1450" b="0" i="0">
                 <a:solidFill>
                   <a:srgbClr val="F7F6EF"/>
                 </a:solidFill>
@@ -31675,7 +31723,7 @@
               <a:t>-22; DE </a:t>
             </a:r>
             <a:r>
-              <a:rPr sz="1550" b="0" i="0">
+              <a:rPr sz="1450" b="0" i="0">
                 <a:solidFill>
                   <a:srgbClr val="FFC83D"/>
                 </a:solidFill>
@@ -31684,7 +31732,7 @@
               <a:t>$12</a:t>
             </a:r>
             <a:r>
-              <a:rPr sz="1550" b="0" i="0">
+              <a:rPr sz="1450" b="0" i="0">
                 <a:solidFill>
                   <a:srgbClr val="F7F6EF"/>
                 </a:solidFill>
@@ -31693,7 +31741,7 @@
               <a:t>-14; FR </a:t>
             </a:r>
             <a:r>
-              <a:rPr sz="1550" b="0" i="0">
+              <a:rPr sz="1450" b="0" i="0">
                 <a:solidFill>
                   <a:srgbClr val="FFC83D"/>
                 </a:solidFill>
@@ -31702,7 +31750,7 @@
               <a:t>$10</a:t>
             </a:r>
             <a:r>
-              <a:rPr sz="1550" b="0" i="0">
+              <a:rPr sz="1450" b="0" i="0">
                 <a:solidFill>
                   <a:srgbClr val="F7F6EF"/>
                 </a:solidFill>
@@ -31711,7 +31759,7 @@
               <a:t>-11; India unverified in any reachable table, </a:t>
             </a:r>
             <a:r>
-              <a:rPr sz="1550" b="0" i="0">
+              <a:rPr sz="1450" b="0" i="0">
                 <a:solidFill>
                   <a:srgbClr val="FFC83D"/>
                 </a:solidFill>
@@ -31720,7 +31768,7 @@
               <a:t>$1</a:t>
             </a:r>
             <a:r>
-              <a:rPr sz="1550" b="0" i="0">
+              <a:rPr sz="1450" b="0" i="0">
                 <a:solidFill>
                   <a:srgbClr val="F7F6EF"/>
                 </a:solidFill>
@@ -31730,12 +31778,12 @@
             </a:r>
           </a:p>
           <a:p>
-            <a:pPr marL="264121" indent="-264121">
+            <a:pPr marL="247088" indent="-247088">
               <a:lnSpc>
                 <a:spcPct val="116000"/>
               </a:lnSpc>
               <a:spcBef>
-                <a:spcPts val="852"/>
+                <a:spcPts val="797"/>
               </a:spcBef>
               <a:buClr>
                 <a:srgbClr val="D4FF3A"/>
@@ -31744,7 +31792,7 @@
               <a:buChar char="—"/>
             </a:pPr>
             <a:r>
-              <a:rPr sz="1550" b="0" i="0">
+              <a:rPr sz="1450" b="0" i="0">
                 <a:solidFill>
                   <a:srgbClr val="F7F6EF"/>
                 </a:solidFill>
@@ -31754,12 +31802,12 @@
             </a:r>
           </a:p>
           <a:p>
-            <a:pPr marL="264121" indent="-264121">
+            <a:pPr marL="247088" indent="-247088">
               <a:lnSpc>
                 <a:spcPct val="116000"/>
               </a:lnSpc>
               <a:spcBef>
-                <a:spcPts val="852"/>
+                <a:spcPts val="797"/>
               </a:spcBef>
               <a:buClr>
                 <a:srgbClr val="D4FF3A"/>
@@ -31768,7 +31816,7 @@
               <a:buChar char="—"/>
             </a:pPr>
             <a:r>
-              <a:rPr sz="1550" b="0" i="0">
+              <a:rPr sz="1450" b="0" i="0">
                 <a:solidFill>
                   <a:srgbClr val="F7F6EF"/>
                 </a:solidFill>
@@ -31777,7 +31825,7 @@
               <a:t>ARPDAU at 2 rewarded ads per DAU (likely): US 5.5¢ · UK 3.8¢ · DE 2.6¢ · FR 2.0¢ · India 0.4-0.8¢. LTV180 at median retention: US </a:t>
             </a:r>
             <a:r>
-              <a:rPr sz="1550" b="0" i="0">
+              <a:rPr sz="1450" b="0" i="0">
                 <a:solidFill>
                   <a:srgbClr val="FFC83D"/>
                 </a:solidFill>
@@ -31786,7 +31834,7 @@
               <a:t>$0.125,</a:t>
             </a:r>
             <a:r>
-              <a:rPr sz="1550" b="0" i="0">
+              <a:rPr sz="1450" b="0" i="0">
                 <a:solidFill>
                   <a:srgbClr val="F7F6EF"/>
                 </a:solidFill>
@@ -31795,7 +31843,7 @@
               <a:t> India ~</a:t>
             </a:r>
             <a:r>
-              <a:rPr sz="1550" b="0" i="0">
+              <a:rPr sz="1450" b="0" i="0">
                 <a:solidFill>
                   <a:srgbClr val="FFC83D"/>
                 </a:solidFill>
@@ -31804,7 +31852,7 @@
               <a:t>$0.01</a:t>
             </a:r>
             <a:r>
-              <a:rPr sz="1550" b="0" i="0">
+              <a:rPr sz="1450" b="0" i="0">
                 <a:solidFill>
                   <a:srgbClr val="F7F6EF"/>
                 </a:solidFill>
@@ -31814,12 +31862,12 @@
             </a:r>
           </a:p>
           <a:p>
-            <a:pPr marL="264121" indent="-264121">
+            <a:pPr marL="247088" indent="-247088">
               <a:lnSpc>
                 <a:spcPct val="116000"/>
               </a:lnSpc>
               <a:spcBef>
-                <a:spcPts val="852"/>
+                <a:spcPts val="797"/>
               </a:spcBef>
               <a:buClr>
                 <a:srgbClr val="D4FF3A"/>
@@ -31828,7 +31876,7 @@
               <a:buChar char="—"/>
             </a:pPr>
             <a:r>
-              <a:rPr sz="1550" b="0" i="0">
+              <a:rPr sz="1450" b="0" i="0">
                 <a:solidFill>
                   <a:srgbClr val="F7F6EF"/>
                 </a:solidFill>
@@ -31838,12 +31886,12 @@
             </a:r>
           </a:p>
           <a:p>
-            <a:pPr marL="264121" indent="-264121">
+            <a:pPr marL="247088" indent="-247088">
               <a:lnSpc>
                 <a:spcPct val="116000"/>
               </a:lnSpc>
               <a:spcBef>
-                <a:spcPts val="852"/>
+                <a:spcPts val="797"/>
               </a:spcBef>
               <a:buClr>
                 <a:srgbClr val="D4FF3A"/>
@@ -31852,7 +31900,7 @@
               <a:buChar char="—"/>
             </a:pPr>
             <a:r>
-              <a:rPr sz="1550" b="0" i="0">
+              <a:rPr sz="1450" b="0" i="0">
                 <a:solidFill>
                   <a:srgbClr val="F7F6EF"/>
                 </a:solidFill>
@@ -31862,12 +31910,12 @@
             </a:r>
           </a:p>
           <a:p>
-            <a:pPr marL="264121" indent="-264121">
+            <a:pPr marL="247088" indent="-247088">
               <a:lnSpc>
                 <a:spcPct val="116000"/>
               </a:lnSpc>
               <a:spcBef>
-                <a:spcPts val="852"/>
+                <a:spcPts val="797"/>
               </a:spcBef>
               <a:buClr>
                 <a:srgbClr val="D4FF3A"/>
@@ -31876,16 +31924,16 @@
               <a:buChar char="—"/>
             </a:pPr>
             <a:r>
-              <a:rPr sz="1550" b="0" i="0">
+              <a:rPr sz="1450" b="0" i="0">
                 <a:solidFill>
                   <a:srgbClr val="F7F6EF"/>
                 </a:solidFill>
                 <a:latin typeface="Arial"/>
               </a:rPr>
-              <a:t>Web pays 30-70% less than in-app and has no server-side verification of completion; verified rewards need the store build (§8.6). Subscription remains an unbuilt later option </a:t>
-            </a:r>
-            <a:r>
-              <a:rPr sz="1550" b="1" i="0">
+              <a:t>Web pays 30-70% less than in-app and has no server-side verification of completion; verified rewards need the store build (§8.6). The Worker build already issues a per-ad nonce and posts each reward as a constraint-guarded ledger grant (one payout per issued nonce); the static build keeps a device wallet. Subscription remains an unbuilt later option </a:t>
+            </a:r>
+            <a:r>
+              <a:rPr sz="1450" b="1" i="0">
                 <a:solidFill>
                   <a:srgbClr val="4EE1FF"/>
                 </a:solidFill>
@@ -31894,7 +31942,7 @@
               <a:t>(P)</a:t>
             </a:r>
             <a:r>
-              <a:rPr sz="1550" b="0" i="0">
+              <a:rPr sz="1450" b="0" i="0">
                 <a:solidFill>
                   <a:srgbClr val="F7F6EF"/>
                 </a:solidFill>

--- a/public/product/investor/factduel-seed-deck.pptx
+++ b/public/product/investor/factduel-seed-deck.pptx
@@ -4261,7 +4261,7 @@
           <a:p/>
           <a:p>
             <a:r>
-              <a:t>SOURCES — keep all four on the face: the Google Play Trivia Crack URL (https://play.google.com/store/apps/details?id=com.etermax.preguntados.lite&amp;hl=en_US&amp;gl=US), https://www.apptweak.com/, and "FACT//DUEL internal: numbers.md §2.1, §2.2, §3.5, §5.2 and §5.14 (company disclosure)". The headline still prints the departure claim in the largest type on the slide, so its source cannot come off.</a:t>
+              <a:t>SOURCES — keep all four on the face: the Google Play Trivia Crack URL (https://play.google.com/store/apps/details?id=com.etermax.preguntados.lite&amp;hl=en_US&amp;gl=US), https://www.apptweak.com/, and "Jaanta Hai Kya (JHK) internal: numbers.md §2.1, §2.2, §3.5, §5.2 and §5.14 (company disclosure)". The headline still prints the departure claim in the largest type on the slide, so its source cannot come off.</a:t>
             </a:r>
           </a:p>
           <a:p/>
@@ -4393,7 +4393,7 @@
           <a:p/>
           <a:p>
             <a:r>
-              <a:t>CHART: benchmark bars only. There is no FACT//DUEL bar because there is no FACT//DUEL rate. Say that when the chart goes up.</a:t>
+              <a:t>CHART: benchmark bars only. There is no Jaanta Hai Kya (JHK) bar because there is no Jaanta Hai Kya (JHK) rate. Say that when the chart goes up.</a:t>
             </a:r>
           </a:p>
           <a:p/>
@@ -7628,7 +7628,7 @@
                 </a:solidFill>
                 <a:latin typeface="Arial"/>
               </a:rPr>
-              <a:t>FACT</a:t>
+              <a:t>JAANTA</a:t>
             </a:r>
             <a:r>
               <a:rPr sz="6200" b="1" i="0" spc="50">
@@ -7637,7 +7637,7 @@
                 </a:solidFill>
                 <a:latin typeface="Arial"/>
               </a:rPr>
-              <a:t>//</a:t>
+              <a:t> HAI </a:t>
             </a:r>
             <a:r>
               <a:rPr sz="6200" b="1" i="0" spc="50">
@@ -7646,7 +7646,7 @@
                 </a:solidFill>
                 <a:latin typeface="Arial"/>
               </a:rPr>
-              <a:t>DUEL</a:t>
+              <a:t>KYA</a:t>
             </a:r>
           </a:p>
           <a:p>
@@ -7971,7 +7971,7 @@
                 </a:solidFill>
                 <a:latin typeface="Arial"/>
               </a:rPr>
-              <a:t>Confidential. For the named recipient only. Every number carries its source. Figures marked (P) are a plan, not a forecast; figures marked (likely) are third-party benchmarks the research could not independently verify. FACT//DUEL has no users outside a private playtest, no revenue, and takes no money from anyone.</a:t>
+              <a:t>Confidential. For the named recipient only. Every number carries its source. Figures marked (P) are a plan, not a forecast; figures marked (likely) are third-party benchmarks the research could not independently verify. Jaanta Hai Kya (JHK), formerly FACT//DUEL, has no users outside a private playtest, no revenue, and takes no money from anyone.</a:t>
             </a:r>
           </a:p>
         </p:txBody>
@@ -8418,7 +8418,7 @@
         </p:nvGraphicFramePr>
         <p:xfrm>
           <a:off x="566928" y="3592322"/>
-          <a:ext cx="11057837" cy="2314696"/>
+          <a:ext cx="11057836" cy="2314696"/>
         </p:xfrm>
         <a:graphic>
           <a:graphicData uri="http://schemas.openxmlformats.org/drawingml/2006/table">
@@ -8427,11 +8427,11 @@
                 <a:tableStyleId>{2D5ABB26-0587-4C30-8999-92F81FD0307C}</a:tableStyleId>
               </a:tblPr>
               <a:tblGrid>
-                <a:gridCol w="1690589"/>
-                <a:gridCol w="2795829"/>
-                <a:gridCol w="2549103"/>
-                <a:gridCol w="1402042"/>
-                <a:gridCol w="2620274"/>
+                <a:gridCol w="1679962"/>
+                <a:gridCol w="2799301"/>
+                <a:gridCol w="2551970"/>
+                <a:gridCol w="1402906"/>
+                <a:gridCol w="2623697"/>
               </a:tblGrid>
               <a:tr h="216784">
                 <a:tc>
@@ -9273,7 +9273,7 @@
                           </a:solidFill>
                           <a:latin typeface="Arial"/>
                         </a:rPr>
-                        <a:t>FACT//DUEL</a:t>
+                        <a:t>Jaanta Hai Kya (JHK)</a:t>
                       </a:r>
                     </a:p>
                   </a:txBody>
@@ -14853,7 +14853,7 @@
                 </a:solidFill>
                 <a:latin typeface="Arial"/>
               </a:rPr>
-              <a:t>Every number about FACT//DUEL: no DAU, no D1/D7/D30 rate, no session length, no conversion, no CAC, no LTV, no revenue. The instrument shipped; the players did not (§7.1).</a:t>
+              <a:t>Every number about Jaanta Hai Kya (JHK): no DAU, no D1/D7/D30 rate, no session length, no conversion, no CAC, no LTV, no revenue. The instrument shipped; the players did not (§7.1).</a:t>
             </a:r>
           </a:p>
           <a:p>

--- a/public/product/investor/factduel-seed-deck.pptx
+++ b/public/product/investor/factduel-seed-deck.pptx
@@ -2021,7 +2021,7 @@
           <a:p/>
           <a:p>
             <a:r>
-              <a:t>The full shipped inventory in the static build (§7.2): bot duels in all three modes, expeditions, discovery, the vault, the passport with the Supporter Card and boards, the events calendar with fixture sets and the limited modes, the coin wallet with the priced ad card, and the Rules of the coin and Trust pages. Behind it, not reachable from the static build: the ledger persisted to D1 with every guard a constraint violation (tests/ledger-store.test.mjs runs one suite against the memory store and the D1 harness), a guest wallet route that issues a nonce per ad and posts each reward as a ledger grant, and an hourly reconcile that replays the books and goes red on drift.</a:t>
+              <a:t>The full shipped inventory in the static build (§7.2): bot duels in all three modes, expeditions, discovery, the vault, the passport with the Supporter Card and boards, the events calendar with fixture sets and the limited modes, the coin wallet with the priced ad card, and the Rules of the coin and Trust pages. Behind it, in the Worker build (Cloudflare deploy workflow in the repo): accounts by magic link and Google with the guest principal promoted in place, cross-device profile sync, a matchmaking queue with no fills, duel entries and prizes on the ledger, and the ledger persisted to D1 with every guard a constraint violation (tests/ledger-store.test.mjs runs one suite against the memory store and the D1 harness), a guest wallet route that issues a nonce per ad and posts each reward as a ledger grant, and an hourly reconcile that replays the books and goes red on drift.</a:t>
             </a:r>
           </a:p>
           <a:p/>
@@ -2033,7 +2033,7 @@
           <a:p/>
           <a:p>
             <a:r>
-              <a:t>Be exact about what it is and is not: no accounts and no server-side progression, the served bank is 329 sports questions, two-device friend duels are disabled in that build with an on-screen notice, it produces no retention data on its own, and nobody who opens it is a user in any sense this deck would count. There is no live feed, no scores service and no rights deal with any league, broadcaster or rights holder.</a:t>
+              <a:t>Be exact about what it is and is not: no accounts and no server-side progression, the served bank is 829 sports questions (565 cricket, 500 of them Indian cricket authored 17 September 2026), two-device friend duels are disabled in that build with an on-screen notice, it produces no retention data on its own, and nobody who opens it is a user in any sense this deck would count. There is no live feed, no scores service and no rights deal with any league, broadcaster or rights holder.</a:t>
             </a:r>
           </a:p>
           <a:p/>
@@ -29841,7 +29841,7 @@
           </a:bodyPr>
           <a:lstStyle/>
           <a:p>
-            <a:pPr marL="204478" indent="-204478">
+            <a:pPr marL="195961" indent="-195961">
               <a:lnSpc>
                 <a:spcPct val="116000"/>
               </a:lnSpc>
@@ -29852,7 +29852,7 @@
               <a:buChar char="—"/>
             </a:pPr>
             <a:r>
-              <a:rPr sz="1200" b="0" i="0">
+              <a:rPr sz="1150" b="0" i="0">
                 <a:solidFill>
                   <a:srgbClr val="F7F6EF"/>
                 </a:solidFill>
@@ -29862,12 +29862,12 @@
             </a:r>
           </a:p>
           <a:p>
-            <a:pPr marL="204478" indent="-204478">
+            <a:pPr marL="195961" indent="-195961">
               <a:lnSpc>
                 <a:spcPct val="116000"/>
               </a:lnSpc>
               <a:spcBef>
-                <a:spcPts val="660"/>
+                <a:spcPts val="632"/>
               </a:spcBef>
               <a:buClr>
                 <a:srgbClr val="D4FF3A"/>
@@ -29876,22 +29876,22 @@
               <a:buChar char="—"/>
             </a:pPr>
             <a:r>
-              <a:rPr sz="1200" b="0" i="0">
+              <a:rPr sz="1150" b="0" i="0">
                 <a:solidFill>
                   <a:srgbClr val="F7F6EF"/>
                 </a:solidFill>
                 <a:latin typeface="Arial"/>
               </a:rPr>
-              <a:t>Sports only since 16 Sep 2026: football, cricket, baseball, Formula 1 and basketball, 60-66 questions each. Science is hidden behind one flag, not deleted.</a:t>
-            </a:r>
-          </a:p>
-          <a:p>
-            <a:pPr marL="204478" indent="-204478">
+              <a:t>Sports only since 16 Sep 2026: football, cricket, baseball, Formula 1 and basketball. On 17 Sep the served bank reached 829 questions, 565 of them cricket (500 on Indian cricket, including 50 on the women's game), every fact checked against a fetched page by its author.</a:t>
+            </a:r>
+          </a:p>
+          <a:p>
+            <a:pPr marL="195961" indent="-195961">
               <a:lnSpc>
                 <a:spcPct val="116000"/>
               </a:lnSpc>
               <a:spcBef>
-                <a:spcPts val="660"/>
+                <a:spcPts val="632"/>
               </a:spcBef>
               <a:buClr>
                 <a:srgbClr val="D4FF3A"/>
@@ -29900,7 +29900,7 @@
               <a:buChar char="—"/>
             </a:pPr>
             <a:r>
-              <a:rPr sz="1200" b="0" i="0">
+              <a:rPr sz="1150" b="0" i="0">
                 <a:solidFill>
                   <a:srgbClr val="F7F6EF"/>
                 </a:solidFill>
@@ -29910,12 +29910,12 @@
             </a:r>
           </a:p>
           <a:p>
-            <a:pPr marL="204478" indent="-204478">
+            <a:pPr marL="195961" indent="-195961">
               <a:lnSpc>
                 <a:spcPct val="116000"/>
               </a:lnSpc>
               <a:spcBef>
-                <a:spcPts val="660"/>
+                <a:spcPts val="632"/>
               </a:spcBef>
               <a:buClr>
                 <a:srgbClr val="D4FF3A"/>
@@ -29924,7 +29924,7 @@
               <a:buChar char="—"/>
             </a:pPr>
             <a:r>
-              <a:rPr sz="1200" b="0" i="0">
+              <a:rPr sz="1150" b="0" i="0">
                 <a:solidFill>
                   <a:srgbClr val="F7F6EF"/>
                 </a:solidFill>
@@ -29934,12 +29934,12 @@
             </a:r>
           </a:p>
           <a:p>
-            <a:pPr marL="204478" indent="-204478">
+            <a:pPr marL="195961" indent="-195961">
               <a:lnSpc>
                 <a:spcPct val="116000"/>
               </a:lnSpc>
               <a:spcBef>
-                <a:spcPts val="660"/>
+                <a:spcPts val="632"/>
               </a:spcBef>
               <a:buClr>
                 <a:srgbClr val="D4FF3A"/>
@@ -29948,7 +29948,7 @@
               <a:buChar char="—"/>
             </a:pPr>
             <a:r>
-              <a:rPr sz="1200" b="0" i="0">
+              <a:rPr sz="1150" b="0" i="0">
                 <a:solidFill>
                   <a:srgbClr val="F7F6EF"/>
                 </a:solidFill>
@@ -29958,12 +29958,12 @@
             </a:r>
           </a:p>
           <a:p>
-            <a:pPr marL="204478" indent="-204478">
+            <a:pPr marL="195961" indent="-195961">
               <a:lnSpc>
                 <a:spcPct val="116000"/>
               </a:lnSpc>
               <a:spcBef>
-                <a:spcPts val="660"/>
+                <a:spcPts val="632"/>
               </a:spcBef>
               <a:buClr>
                 <a:srgbClr val="D4FF3A"/>
@@ -29972,7 +29972,7 @@
               <a:buChar char="—"/>
             </a:pPr>
             <a:r>
-              <a:rPr sz="1200" b="0" i="0">
+              <a:rPr sz="1150" b="0" i="0">
                 <a:solidFill>
                   <a:srgbClr val="F7F6EF"/>
                 </a:solidFill>
